--- a/2606/training_set_report.pptx
+++ b/2606/training_set_report.pptx
@@ -5,7 +5,7 @@
     <p:sldMasterId id="2147483648" r:id="rId1"/>
   </p:sldMasterIdLst>
   <p:notesMasterIdLst>
-    <p:notesMasterId r:id="rId8"/>
+    <p:notesMasterId r:id="rId10"/>
   </p:notesMasterIdLst>
   <p:sldIdLst>
     <p:sldId id="256" r:id="rId2"/>
@@ -14,6 +14,8 @@
     <p:sldId id="259" r:id="rId5"/>
     <p:sldId id="260" r:id="rId6"/>
     <p:sldId id="261" r:id="rId7"/>
+    <p:sldId id="262" r:id="rId8"/>
+    <p:sldId id="263" r:id="rId9"/>
   </p:sldIdLst>
   <p:sldSz cx="9144000" cy="5143500" type="screen16x9"/>
   <p:notesSz cx="5143500" cy="9144000"/>
@@ -10177,6 +10179,2487 @@
               <a:t>Assess precision vs recall trade-off of 0.75 vs 0.95 threshold. EVA dominance at 0.75 warrants a sensitivity analysis.</a:t>
             </a:r>
             <a:endParaRPr lang="en-US" sz="1100" dirty="0"/>
+          </a:p>
+        </p:txBody>
+      </p:sp>
+    </p:spTree>
+  </p:cSld>
+  <p:clrMapOvr>
+    <a:masterClrMapping/>
+  </p:clrMapOvr>
+</p:sld>
+</file>
+
+<file path=ppt/slides/slide7.xml><?xml version="1.0" encoding="utf-8"?>
+<p:sld xmlns:a="http://schemas.openxmlformats.org/drawingml/2006/main" xmlns:r="http://schemas.openxmlformats.org/officeDocument/2006/relationships" xmlns:p="http://schemas.openxmlformats.org/presentationml/2006/main">
+  <p:cSld>
+    <p:bg>
+      <p:bgPr>
+        <a:solidFill>
+          <a:srgbClr val="F0F7FA"/>
+        </a:solidFill>
+        <a:effectLst/>
+      </p:bgPr>
+    </p:bg>
+    <p:spTree>
+      <p:nvGrpSpPr>
+        <p:cNvPr id="1" name=""/>
+        <p:cNvGrpSpPr/>
+        <p:nvPr/>
+      </p:nvGrpSpPr>
+      <p:grpSpPr>
+        <a:xfrm>
+          <a:off x="0" y="0"/>
+          <a:ext cx="0" cy="0"/>
+          <a:chOff x="0" y="0"/>
+          <a:chExt cx="0" cy="0"/>
+        </a:xfrm>
+      </p:grpSpPr>
+      <p:sp>
+        <p:nvSpPr>
+          <p:cNvPr id="2" name="Shape 0"/>
+          <p:cNvSpPr/>
+          <p:nvPr/>
+        </p:nvSpPr>
+        <p:spPr>
+          <a:xfrm>
+            <a:off x="0" y="0"/>
+            <a:ext cx="9144000" cy="640080"/>
+          </a:xfrm>
+          <a:prstGeom prst="rect">
+            <a:avLst/>
+          </a:prstGeom>
+          <a:solidFill>
+            <a:srgbClr val="0D2B45"/>
+          </a:solidFill>
+          <a:ln w="12700">
+            <a:solidFill>
+              <a:srgbClr val="0D2B45"/>
+            </a:solidFill>
+            <a:prstDash val="solid"/>
+          </a:ln>
+        </p:spPr>
+        <p:txBody>
+          <a:bodyPr/>
+          <a:lstStyle/>
+          <a:p>
+            <a:endParaRPr lang="en-US"/>
+          </a:p>
+        </p:txBody>
+      </p:sp>
+      <p:sp>
+        <p:nvSpPr>
+          <p:cNvPr id="3" name="Text 1"/>
+          <p:cNvSpPr/>
+          <p:nvPr/>
+        </p:nvSpPr>
+        <p:spPr>
+          <a:xfrm>
+            <a:off x="457200" y="0"/>
+            <a:ext cx="8229600" cy="640080"/>
+          </a:xfrm>
+          <a:prstGeom prst="rect">
+            <a:avLst/>
+          </a:prstGeom>
+          <a:noFill/>
+          <a:ln/>
+        </p:spPr>
+        <p:txBody>
+          <a:bodyPr wrap="square" lIns="0" tIns="0" rIns="0" bIns="0" rtlCol="0" anchor="ctr"/>
+          <a:lstStyle/>
+          <a:p>
+            <a:pPr marL="0" indent="0">
+              <a:buNone/>
+            </a:pPr>
+            <a:r>
+              <a:rPr lang="en-US" sz="2200" b="1" dirty="0">
+                <a:solidFill>
+                  <a:srgbClr val="FFFFFF"/>
+                </a:solidFill>
+              </a:rPr>
+              <a:t>Nearest-TSS Gene Analysis &amp; Feature Taxonomy</a:t>
+            </a:r>
+            <a:endParaRPr lang="en-US" sz="2200" dirty="0"/>
+          </a:p>
+        </p:txBody>
+      </p:sp>
+      <p:sp>
+        <p:nvSpPr>
+          <p:cNvPr id="4" name="Shape 2"/>
+          <p:cNvSpPr/>
+          <p:nvPr/>
+        </p:nvSpPr>
+        <p:spPr>
+          <a:xfrm>
+            <a:off x="274320" y="777240"/>
+            <a:ext cx="4023360" cy="4160520"/>
+          </a:xfrm>
+          <a:prstGeom prst="rect">
+            <a:avLst/>
+          </a:prstGeom>
+          <a:solidFill>
+            <a:srgbClr val="FFFFFF"/>
+          </a:solidFill>
+          <a:ln/>
+          <a:effectLst>
+            <a:outerShdw blurRad="88900" dist="25400" dir="8100000" algn="bl" rotWithShape="0">
+              <a:srgbClr val="000000">
+                <a:alpha val="11000"/>
+              </a:srgbClr>
+            </a:outerShdw>
+          </a:effectLst>
+        </p:spPr>
+        <p:txBody>
+          <a:bodyPr/>
+          <a:lstStyle/>
+          <a:p>
+            <a:endParaRPr lang="en-US"/>
+          </a:p>
+        </p:txBody>
+      </p:sp>
+      <p:sp>
+        <p:nvSpPr>
+          <p:cNvPr id="5" name="Shape 3"/>
+          <p:cNvSpPr/>
+          <p:nvPr/>
+        </p:nvSpPr>
+        <p:spPr>
+          <a:xfrm>
+            <a:off x="274320" y="777240"/>
+            <a:ext cx="4023360" cy="64008"/>
+          </a:xfrm>
+          <a:prstGeom prst="rect">
+            <a:avLst/>
+          </a:prstGeom>
+          <a:solidFill>
+            <a:srgbClr val="0E7490"/>
+          </a:solidFill>
+          <a:ln w="12700">
+            <a:solidFill>
+              <a:srgbClr val="0E7490"/>
+            </a:solidFill>
+            <a:prstDash val="solid"/>
+          </a:ln>
+        </p:spPr>
+        <p:txBody>
+          <a:bodyPr/>
+          <a:lstStyle/>
+          <a:p>
+            <a:endParaRPr lang="en-US"/>
+          </a:p>
+        </p:txBody>
+      </p:sp>
+      <p:sp>
+        <p:nvSpPr>
+          <p:cNvPr id="6" name="Text 4"/>
+          <p:cNvSpPr/>
+          <p:nvPr/>
+        </p:nvSpPr>
+        <p:spPr>
+          <a:xfrm>
+            <a:off x="411480" y="841248"/>
+            <a:ext cx="3840480" cy="347472"/>
+          </a:xfrm>
+          <a:prstGeom prst="rect">
+            <a:avLst/>
+          </a:prstGeom>
+          <a:noFill/>
+          <a:ln/>
+        </p:spPr>
+        <p:txBody>
+          <a:bodyPr wrap="square" lIns="0" tIns="0" rIns="0" bIns="0" rtlCol="0" anchor="ctr"/>
+          <a:lstStyle/>
+          <a:p>
+            <a:pPr marL="0" indent="0">
+              <a:buNone/>
+            </a:pPr>
+            <a:r>
+              <a:rPr lang="en-US" sz="1300" b="1" dirty="0">
+                <a:solidFill>
+                  <a:srgbClr val="0E7490"/>
+                </a:solidFill>
+              </a:rPr>
+              <a:t>Nearest-TSS Composition of Positives</a:t>
+            </a:r>
+            <a:endParaRPr lang="en-US" sz="1300" dirty="0"/>
+          </a:p>
+        </p:txBody>
+      </p:sp>
+      <p:sp>
+        <p:nvSpPr>
+          <p:cNvPr id="7" name="Shape 5"/>
+          <p:cNvSpPr/>
+          <p:nvPr/>
+        </p:nvSpPr>
+        <p:spPr>
+          <a:xfrm>
+            <a:off x="411480" y="1298448"/>
+            <a:ext cx="3749040" cy="1417320"/>
+          </a:xfrm>
+          <a:prstGeom prst="rect">
+            <a:avLst/>
+          </a:prstGeom>
+          <a:solidFill>
+            <a:srgbClr val="F4F9FF"/>
+          </a:solidFill>
+          <a:ln w="12700">
+            <a:solidFill>
+              <a:srgbClr val="DDE8F5"/>
+            </a:solidFill>
+            <a:prstDash val="solid"/>
+          </a:ln>
+        </p:spPr>
+        <p:txBody>
+          <a:bodyPr/>
+          <a:lstStyle/>
+          <a:p>
+            <a:endParaRPr lang="en-US"/>
+          </a:p>
+        </p:txBody>
+      </p:sp>
+      <p:sp>
+        <p:nvSpPr>
+          <p:cNvPr id="8" name="Text 6"/>
+          <p:cNvSpPr/>
+          <p:nvPr/>
+        </p:nvSpPr>
+        <p:spPr>
+          <a:xfrm>
+            <a:off x="411480" y="1371600"/>
+            <a:ext cx="3749040" cy="594360"/>
+          </a:xfrm>
+          <a:prstGeom prst="rect">
+            <a:avLst/>
+          </a:prstGeom>
+          <a:noFill/>
+          <a:ln/>
+        </p:spPr>
+        <p:txBody>
+          <a:bodyPr wrap="square" lIns="0" tIns="0" rIns="0" bIns="0" rtlCol="0" anchor="ctr"/>
+          <a:lstStyle/>
+          <a:p>
+            <a:pPr marL="0" indent="0" algn="ctr">
+              <a:buNone/>
+            </a:pPr>
+            <a:r>
+              <a:rPr lang="en-US" sz="3000" b="1" dirty="0">
+                <a:solidFill>
+                  <a:srgbClr val="2471A3"/>
+                </a:solidFill>
+              </a:rPr>
+              <a:t>55.1%</a:t>
+            </a:r>
+            <a:endParaRPr lang="en-US" sz="3000" dirty="0"/>
+          </a:p>
+        </p:txBody>
+      </p:sp>
+      <p:sp>
+        <p:nvSpPr>
+          <p:cNvPr id="9" name="Text 7"/>
+          <p:cNvSpPr/>
+          <p:nvPr/>
+        </p:nvSpPr>
+        <p:spPr>
+          <a:xfrm>
+            <a:off x="411480" y="1965960"/>
+            <a:ext cx="3749040" cy="320040"/>
+          </a:xfrm>
+          <a:prstGeom prst="rect">
+            <a:avLst/>
+          </a:prstGeom>
+          <a:noFill/>
+          <a:ln/>
+        </p:spPr>
+        <p:txBody>
+          <a:bodyPr wrap="square" lIns="0" tIns="0" rIns="0" bIns="0" rtlCol="0" anchor="ctr"/>
+          <a:lstStyle/>
+          <a:p>
+            <a:pPr marL="0" indent="0" algn="ctr">
+              <a:buNone/>
+            </a:pPr>
+            <a:r>
+              <a:rPr lang="en-US" sz="1400" dirty="0">
+                <a:solidFill>
+                  <a:srgbClr val="1E293B"/>
+                </a:solidFill>
+              </a:rPr>
+              <a:t>7,201 rows</a:t>
+            </a:r>
+            <a:endParaRPr lang="en-US" sz="1400" dirty="0"/>
+          </a:p>
+        </p:txBody>
+      </p:sp>
+      <p:sp>
+        <p:nvSpPr>
+          <p:cNvPr id="10" name="Text 8"/>
+          <p:cNvSpPr/>
+          <p:nvPr/>
+        </p:nvSpPr>
+        <p:spPr>
+          <a:xfrm>
+            <a:off x="411480" y="2304288"/>
+            <a:ext cx="3749040" cy="274320"/>
+          </a:xfrm>
+          <a:prstGeom prst="rect">
+            <a:avLst/>
+          </a:prstGeom>
+          <a:noFill/>
+          <a:ln/>
+        </p:spPr>
+        <p:txBody>
+          <a:bodyPr wrap="square" lIns="0" tIns="0" rIns="0" bIns="0" rtlCol="0" anchor="ctr"/>
+          <a:lstStyle/>
+          <a:p>
+            <a:pPr marL="0" indent="0" algn="ctr">
+              <a:buNone/>
+            </a:pPr>
+            <a:r>
+              <a:rPr lang="en-US" sz="1100" dirty="0">
+                <a:solidFill>
+                  <a:srgbClr val="475569"/>
+                </a:solidFill>
+              </a:rPr>
+              <a:t>Nearest TSS (score = 1.0)</a:t>
+            </a:r>
+            <a:endParaRPr lang="en-US" sz="1100" dirty="0"/>
+          </a:p>
+        </p:txBody>
+      </p:sp>
+      <p:sp>
+        <p:nvSpPr>
+          <p:cNvPr id="11" name="Shape 9"/>
+          <p:cNvSpPr/>
+          <p:nvPr/>
+        </p:nvSpPr>
+        <p:spPr>
+          <a:xfrm>
+            <a:off x="411480" y="2898648"/>
+            <a:ext cx="3749040" cy="1417320"/>
+          </a:xfrm>
+          <a:prstGeom prst="rect">
+            <a:avLst/>
+          </a:prstGeom>
+          <a:solidFill>
+            <a:srgbClr val="F4F9FF"/>
+          </a:solidFill>
+          <a:ln w="12700">
+            <a:solidFill>
+              <a:srgbClr val="DDE8F5"/>
+            </a:solidFill>
+            <a:prstDash val="solid"/>
+          </a:ln>
+        </p:spPr>
+        <p:txBody>
+          <a:bodyPr/>
+          <a:lstStyle/>
+          <a:p>
+            <a:endParaRPr lang="en-US"/>
+          </a:p>
+        </p:txBody>
+      </p:sp>
+      <p:sp>
+        <p:nvSpPr>
+          <p:cNvPr id="12" name="Text 10"/>
+          <p:cNvSpPr/>
+          <p:nvPr/>
+        </p:nvSpPr>
+        <p:spPr>
+          <a:xfrm>
+            <a:off x="411480" y="2971800"/>
+            <a:ext cx="3749040" cy="594360"/>
+          </a:xfrm>
+          <a:prstGeom prst="rect">
+            <a:avLst/>
+          </a:prstGeom>
+          <a:noFill/>
+          <a:ln/>
+        </p:spPr>
+        <p:txBody>
+          <a:bodyPr wrap="square" lIns="0" tIns="0" rIns="0" bIns="0" rtlCol="0" anchor="ctr"/>
+          <a:lstStyle/>
+          <a:p>
+            <a:pPr marL="0" indent="0" algn="ctr">
+              <a:buNone/>
+            </a:pPr>
+            <a:r>
+              <a:rPr lang="en-US" sz="3000" b="1" dirty="0">
+                <a:solidFill>
+                  <a:srgbClr val="E67E22"/>
+                </a:solidFill>
+              </a:rPr>
+              <a:t>44.9%</a:t>
+            </a:r>
+            <a:endParaRPr lang="en-US" sz="3000" dirty="0"/>
+          </a:p>
+        </p:txBody>
+      </p:sp>
+      <p:sp>
+        <p:nvSpPr>
+          <p:cNvPr id="13" name="Text 11"/>
+          <p:cNvSpPr/>
+          <p:nvPr/>
+        </p:nvSpPr>
+        <p:spPr>
+          <a:xfrm>
+            <a:off x="411480" y="3566160"/>
+            <a:ext cx="3749040" cy="320040"/>
+          </a:xfrm>
+          <a:prstGeom prst="rect">
+            <a:avLst/>
+          </a:prstGeom>
+          <a:noFill/>
+          <a:ln/>
+        </p:spPr>
+        <p:txBody>
+          <a:bodyPr wrap="square" lIns="0" tIns="0" rIns="0" bIns="0" rtlCol="0" anchor="ctr"/>
+          <a:lstStyle/>
+          <a:p>
+            <a:pPr marL="0" indent="0" algn="ctr">
+              <a:buNone/>
+            </a:pPr>
+            <a:r>
+              <a:rPr lang="en-US" sz="1400" dirty="0">
+                <a:solidFill>
+                  <a:srgbClr val="1E293B"/>
+                </a:solidFill>
+              </a:rPr>
+              <a:t>5,859 rows</a:t>
+            </a:r>
+            <a:endParaRPr lang="en-US" sz="1400" dirty="0"/>
+          </a:p>
+        </p:txBody>
+      </p:sp>
+      <p:sp>
+        <p:nvSpPr>
+          <p:cNvPr id="14" name="Text 12"/>
+          <p:cNvSpPr/>
+          <p:nvPr/>
+        </p:nvSpPr>
+        <p:spPr>
+          <a:xfrm>
+            <a:off x="411480" y="3904488"/>
+            <a:ext cx="3749040" cy="274320"/>
+          </a:xfrm>
+          <a:prstGeom prst="rect">
+            <a:avLst/>
+          </a:prstGeom>
+          <a:noFill/>
+          <a:ln/>
+        </p:spPr>
+        <p:txBody>
+          <a:bodyPr wrap="square" lIns="0" tIns="0" rIns="0" bIns="0" rtlCol="0" anchor="ctr"/>
+          <a:lstStyle/>
+          <a:p>
+            <a:pPr marL="0" indent="0" algn="ctr">
+              <a:buNone/>
+            </a:pPr>
+            <a:r>
+              <a:rPr lang="en-US" sz="1100" dirty="0">
+                <a:solidFill>
+                  <a:srgbClr val="475569"/>
+                </a:solidFill>
+              </a:rPr>
+              <a:t>Non-nearest (score &lt; 1.0)</a:t>
+            </a:r>
+            <a:endParaRPr lang="en-US" sz="1100" dirty="0"/>
+          </a:p>
+        </p:txBody>
+      </p:sp>
+      <p:sp>
+        <p:nvSpPr>
+          <p:cNvPr id="15" name="Text 13"/>
+          <p:cNvSpPr/>
+          <p:nvPr/>
+        </p:nvSpPr>
+        <p:spPr>
+          <a:xfrm>
+            <a:off x="411480" y="4462272"/>
+            <a:ext cx="3749040" cy="411480"/>
+          </a:xfrm>
+          <a:prstGeom prst="rect">
+            <a:avLst/>
+          </a:prstGeom>
+          <a:noFill/>
+          <a:ln/>
+        </p:spPr>
+        <p:txBody>
+          <a:bodyPr wrap="square" lIns="0" tIns="0" rIns="0" bIns="0" rtlCol="0" anchor="ctr"/>
+          <a:lstStyle/>
+          <a:p>
+            <a:pPr marL="0" indent="0">
+              <a:buNone/>
+            </a:pPr>
+            <a:r>
+              <a:rPr lang="en-US" sz="950" i="1" dirty="0">
+                <a:solidFill>
+                  <a:srgbClr val="475569"/>
+                </a:solidFill>
+              </a:rPr>
+              <a:t>distanceSentinelTssNeighbourhood is a continuous 0–1 score.</a:t>
+            </a:r>
+            <a:endParaRPr lang="en-US" sz="950" dirty="0"/>
+          </a:p>
+          <a:p>
+            <a:pPr marL="0" indent="0">
+              <a:buNone/>
+            </a:pPr>
+            <a:r>
+              <a:rPr lang="en-US" sz="950" i="1" dirty="0">
+                <a:solidFill>
+                  <a:srgbClr val="475569"/>
+                </a:solidFill>
+              </a:rPr>
+              <a:t>1.0 = nearest TSS gene.  Median of non-nearest = 0.982 (mostly second-nearest).</a:t>
+            </a:r>
+            <a:endParaRPr lang="en-US" sz="950" dirty="0"/>
+          </a:p>
+        </p:txBody>
+      </p:sp>
+      <p:sp>
+        <p:nvSpPr>
+          <p:cNvPr id="16" name="Shape 14"/>
+          <p:cNvSpPr/>
+          <p:nvPr/>
+        </p:nvSpPr>
+        <p:spPr>
+          <a:xfrm>
+            <a:off x="4572000" y="777240"/>
+            <a:ext cx="4251960" cy="4160520"/>
+          </a:xfrm>
+          <a:prstGeom prst="rect">
+            <a:avLst/>
+          </a:prstGeom>
+          <a:solidFill>
+            <a:srgbClr val="FFFFFF"/>
+          </a:solidFill>
+          <a:ln/>
+          <a:effectLst>
+            <a:outerShdw blurRad="88900" dist="25400" dir="8100000" algn="bl" rotWithShape="0">
+              <a:srgbClr val="000000">
+                <a:alpha val="11000"/>
+              </a:srgbClr>
+            </a:outerShdw>
+          </a:effectLst>
+        </p:spPr>
+        <p:txBody>
+          <a:bodyPr/>
+          <a:lstStyle/>
+          <a:p>
+            <a:endParaRPr lang="en-US"/>
+          </a:p>
+        </p:txBody>
+      </p:sp>
+      <p:sp>
+        <p:nvSpPr>
+          <p:cNvPr id="17" name="Shape 15"/>
+          <p:cNvSpPr/>
+          <p:nvPr/>
+        </p:nvSpPr>
+        <p:spPr>
+          <a:xfrm>
+            <a:off x="4572000" y="777240"/>
+            <a:ext cx="4251960" cy="64008"/>
+          </a:xfrm>
+          <a:prstGeom prst="rect">
+            <a:avLst/>
+          </a:prstGeom>
+          <a:solidFill>
+            <a:srgbClr val="D97706"/>
+          </a:solidFill>
+          <a:ln w="12700">
+            <a:solidFill>
+              <a:srgbClr val="D97706"/>
+            </a:solidFill>
+            <a:prstDash val="solid"/>
+          </a:ln>
+        </p:spPr>
+        <p:txBody>
+          <a:bodyPr/>
+          <a:lstStyle/>
+          <a:p>
+            <a:endParaRPr lang="en-US"/>
+          </a:p>
+        </p:txBody>
+      </p:sp>
+      <p:sp>
+        <p:nvSpPr>
+          <p:cNvPr id="18" name="Text 16"/>
+          <p:cNvSpPr/>
+          <p:nvPr/>
+        </p:nvSpPr>
+        <p:spPr>
+          <a:xfrm>
+            <a:off x="4709160" y="841248"/>
+            <a:ext cx="4023360" cy="347472"/>
+          </a:xfrm>
+          <a:prstGeom prst="rect">
+            <a:avLst/>
+          </a:prstGeom>
+          <a:noFill/>
+          <a:ln/>
+        </p:spPr>
+        <p:txBody>
+          <a:bodyPr wrap="square" lIns="0" tIns="0" rIns="0" bIns="0" rtlCol="0" anchor="ctr"/>
+          <a:lstStyle/>
+          <a:p>
+            <a:pPr marL="0" indent="0">
+              <a:buNone/>
+            </a:pPr>
+            <a:r>
+              <a:rPr lang="en-US" sz="1300" b="1" dirty="0">
+                <a:solidFill>
+                  <a:srgbClr val="D97706"/>
+                </a:solidFill>
+              </a:rPr>
+              <a:t>Feature Taxonomy</a:t>
+            </a:r>
+            <a:endParaRPr lang="en-US" sz="1300" dirty="0"/>
+          </a:p>
+        </p:txBody>
+      </p:sp>
+      <p:graphicFrame>
+        <p:nvGraphicFramePr>
+          <p:cNvPr id="19" name="Table 0"/>
+          <p:cNvGraphicFramePr>
+            <a:graphicFrameLocks noGrp="1"/>
+          </p:cNvGraphicFramePr>
+          <p:nvPr>
+            <p:extLst>
+              <p:ext uri="{D42A27DB-BD31-4B8C-83A1-F6EECF244321}">
+                <p14:modId xmlns:p14="http://schemas.microsoft.com/office/powerpoint/2010/main" val="1579011935"/>
+              </p:ext>
+            </p:extLst>
+          </p:nvPr>
+        </p:nvGraphicFramePr>
+        <p:xfrm>
+          <a:off x="4663440" y="1261872"/>
+          <a:ext cx="4069080" cy="3291840"/>
+        </p:xfrm>
+        <a:graphic>
+          <a:graphicData uri="http://schemas.openxmlformats.org/drawingml/2006/table">
+            <a:tbl>
+              <a:tblPr/>
+              <a:tblGrid>
+                <a:gridCol w="1463040">
+                  <a:extLst>
+                    <a:ext uri="{9D8B030D-6E8A-4147-A177-3AD203B41FA5}">
+                      <a16:colId xmlns:a16="http://schemas.microsoft.com/office/drawing/2014/main" val="20000"/>
+                    </a:ext>
+                  </a:extLst>
+                </a:gridCol>
+                <a:gridCol w="2606040">
+                  <a:extLst>
+                    <a:ext uri="{9D8B030D-6E8A-4147-A177-3AD203B41FA5}">
+                      <a16:colId xmlns:a16="http://schemas.microsoft.com/office/drawing/2014/main" val="20001"/>
+                    </a:ext>
+                  </a:extLst>
+                </a:gridCol>
+              </a:tblGrid>
+              <a:tr h="548640">
+                <a:tc>
+                  <a:txBody>
+                    <a:bodyPr/>
+                    <a:lstStyle/>
+                    <a:p>
+                      <a:pPr marL="0" indent="0">
+                        <a:buNone/>
+                      </a:pPr>
+                      <a:r>
+                        <a:rPr lang="en-US" sz="1100" b="1" dirty="0">
+                          <a:solidFill>
+                            <a:srgbClr val="FFFFFF"/>
+                          </a:solidFill>
+                        </a:rPr>
+                        <a:t>Category</a:t>
+                      </a:r>
+                      <a:endParaRPr lang="en-US" sz="1100" dirty="0"/>
+                    </a:p>
+                  </a:txBody>
+                  <a:tcPr marT="54864" marB="54864">
+                    <a:lnL w="6350" cap="flat" cmpd="sng" algn="ctr">
+                      <a:solidFill>
+                        <a:srgbClr val="CBD5E1"/>
+                      </a:solidFill>
+                      <a:prstDash val="solid"/>
+                      <a:round/>
+                      <a:headEnd type="none" w="med" len="med"/>
+                      <a:tailEnd type="none" w="med" len="med"/>
+                    </a:lnL>
+                    <a:lnR w="6350" cap="flat" cmpd="sng" algn="ctr">
+                      <a:solidFill>
+                        <a:srgbClr val="CBD5E1"/>
+                      </a:solidFill>
+                      <a:prstDash val="solid"/>
+                      <a:round/>
+                      <a:headEnd type="none" w="med" len="med"/>
+                      <a:tailEnd type="none" w="med" len="med"/>
+                    </a:lnR>
+                    <a:lnT w="6350" cap="flat" cmpd="sng" algn="ctr">
+                      <a:solidFill>
+                        <a:srgbClr val="CBD5E1"/>
+                      </a:solidFill>
+                      <a:prstDash val="solid"/>
+                      <a:round/>
+                      <a:headEnd type="none" w="med" len="med"/>
+                      <a:tailEnd type="none" w="med" len="med"/>
+                    </a:lnT>
+                    <a:lnB w="6350" cap="flat" cmpd="sng" algn="ctr">
+                      <a:solidFill>
+                        <a:srgbClr val="CBD5E1"/>
+                      </a:solidFill>
+                      <a:prstDash val="solid"/>
+                      <a:round/>
+                      <a:headEnd type="none" w="med" len="med"/>
+                      <a:tailEnd type="none" w="med" len="med"/>
+                    </a:lnB>
+                    <a:solidFill>
+                      <a:srgbClr val="0D2B45"/>
+                    </a:solidFill>
+                  </a:tcPr>
+                </a:tc>
+                <a:tc>
+                  <a:txBody>
+                    <a:bodyPr/>
+                    <a:lstStyle/>
+                    <a:p>
+                      <a:pPr marL="0" indent="0">
+                        <a:buNone/>
+                      </a:pPr>
+                      <a:r>
+                        <a:rPr lang="en-US" sz="1100" b="1" dirty="0">
+                          <a:solidFill>
+                            <a:srgbClr val="FFFFFF"/>
+                          </a:solidFill>
+                        </a:rPr>
+                        <a:t>Features</a:t>
+                      </a:r>
+                      <a:endParaRPr lang="en-US" sz="1100" dirty="0"/>
+                    </a:p>
+                  </a:txBody>
+                  <a:tcPr marT="54864" marB="54864">
+                    <a:lnL w="6350" cap="flat" cmpd="sng" algn="ctr">
+                      <a:solidFill>
+                        <a:srgbClr val="CBD5E1"/>
+                      </a:solidFill>
+                      <a:prstDash val="solid"/>
+                      <a:round/>
+                      <a:headEnd type="none" w="med" len="med"/>
+                      <a:tailEnd type="none" w="med" len="med"/>
+                    </a:lnL>
+                    <a:lnR w="6350" cap="flat" cmpd="sng" algn="ctr">
+                      <a:solidFill>
+                        <a:srgbClr val="CBD5E1"/>
+                      </a:solidFill>
+                      <a:prstDash val="solid"/>
+                      <a:round/>
+                      <a:headEnd type="none" w="med" len="med"/>
+                      <a:tailEnd type="none" w="med" len="med"/>
+                    </a:lnR>
+                    <a:lnT w="6350" cap="flat" cmpd="sng" algn="ctr">
+                      <a:solidFill>
+                        <a:srgbClr val="CBD5E1"/>
+                      </a:solidFill>
+                      <a:prstDash val="solid"/>
+                      <a:round/>
+                      <a:headEnd type="none" w="med" len="med"/>
+                      <a:tailEnd type="none" w="med" len="med"/>
+                    </a:lnT>
+                    <a:lnB w="6350" cap="flat" cmpd="sng" algn="ctr">
+                      <a:solidFill>
+                        <a:srgbClr val="CBD5E1"/>
+                      </a:solidFill>
+                      <a:prstDash val="solid"/>
+                      <a:round/>
+                      <a:headEnd type="none" w="med" len="med"/>
+                      <a:tailEnd type="none" w="med" len="med"/>
+                    </a:lnB>
+                    <a:solidFill>
+                      <a:srgbClr val="0D2B45"/>
+                    </a:solidFill>
+                  </a:tcPr>
+                </a:tc>
+                <a:extLst>
+                  <a:ext uri="{0D108BD9-81ED-4DB2-BD59-A6C34878D82A}">
+                    <a16:rowId xmlns:a16="http://schemas.microsoft.com/office/drawing/2014/main" val="10000"/>
+                  </a:ext>
+                </a:extLst>
+              </a:tr>
+              <a:tr h="548640">
+                <a:tc>
+                  <a:txBody>
+                    <a:bodyPr/>
+                    <a:lstStyle/>
+                    <a:p>
+                      <a:pPr marL="0" indent="0">
+                        <a:buNone/>
+                      </a:pPr>
+                      <a:r>
+                        <a:rPr lang="en-US" sz="1000" b="1" dirty="0">
+                          <a:solidFill>
+                            <a:srgbClr val="1E293B"/>
+                          </a:solidFill>
+                        </a:rPr>
+                        <a:t>Functional</a:t>
+                      </a:r>
+                      <a:endParaRPr lang="en-US" sz="1000" dirty="0"/>
+                    </a:p>
+                    <a:p>
+                      <a:pPr marL="0" indent="0">
+                        <a:buNone/>
+                      </a:pPr>
+                      <a:r>
+                        <a:rPr lang="en-US" sz="1000" b="1" dirty="0">
+                          <a:solidFill>
+                            <a:srgbClr val="1E293B"/>
+                          </a:solidFill>
+                        </a:rPr>
+                        <a:t>Genomics — QTL</a:t>
+                      </a:r>
+                      <a:endParaRPr lang="en-US" sz="1000" dirty="0"/>
+                    </a:p>
+                  </a:txBody>
+                  <a:tcPr marT="54864" marB="54864">
+                    <a:lnL w="6350" cap="flat" cmpd="sng" algn="ctr">
+                      <a:solidFill>
+                        <a:srgbClr val="CBD5E1"/>
+                      </a:solidFill>
+                      <a:prstDash val="solid"/>
+                      <a:round/>
+                      <a:headEnd type="none" w="med" len="med"/>
+                      <a:tailEnd type="none" w="med" len="med"/>
+                    </a:lnL>
+                    <a:lnR w="6350" cap="flat" cmpd="sng" algn="ctr">
+                      <a:solidFill>
+                        <a:srgbClr val="CBD5E1"/>
+                      </a:solidFill>
+                      <a:prstDash val="solid"/>
+                      <a:round/>
+                      <a:headEnd type="none" w="med" len="med"/>
+                      <a:tailEnd type="none" w="med" len="med"/>
+                    </a:lnR>
+                    <a:lnT w="6350" cap="flat" cmpd="sng" algn="ctr">
+                      <a:solidFill>
+                        <a:srgbClr val="CBD5E1"/>
+                      </a:solidFill>
+                      <a:prstDash val="solid"/>
+                      <a:round/>
+                      <a:headEnd type="none" w="med" len="med"/>
+                      <a:tailEnd type="none" w="med" len="med"/>
+                    </a:lnT>
+                    <a:lnB w="6350" cap="flat" cmpd="sng" algn="ctr">
+                      <a:solidFill>
+                        <a:srgbClr val="CBD5E1"/>
+                      </a:solidFill>
+                      <a:prstDash val="solid"/>
+                      <a:round/>
+                      <a:headEnd type="none" w="med" len="med"/>
+                      <a:tailEnd type="none" w="med" len="med"/>
+                    </a:lnB>
+                  </a:tcPr>
+                </a:tc>
+                <a:tc>
+                  <a:txBody>
+                    <a:bodyPr/>
+                    <a:lstStyle/>
+                    <a:p>
+                      <a:pPr marL="0" indent="0">
+                        <a:buNone/>
+                      </a:pPr>
+                      <a:r>
+                        <a:rPr lang="en-US" sz="1000" dirty="0">
+                          <a:solidFill>
+                            <a:srgbClr val="475569"/>
+                          </a:solidFill>
+                        </a:rPr>
+                        <a:t>eQTL CLPP/H4, pQTL CLPP/H4, sQTL CLPP/H4</a:t>
+                      </a:r>
+                      <a:endParaRPr lang="en-US" sz="1000" dirty="0"/>
+                    </a:p>
+                    <a:p>
+                      <a:pPr marL="0" indent="0">
+                        <a:buNone/>
+                      </a:pPr>
+                      <a:r>
+                        <a:rPr lang="en-US" sz="1000" dirty="0">
+                          <a:solidFill>
+                            <a:srgbClr val="475569"/>
+                          </a:solidFill>
+                        </a:rPr>
+                        <a:t>(+ neighbourhood versions)</a:t>
+                      </a:r>
+                      <a:endParaRPr lang="en-US" sz="1000" dirty="0"/>
+                    </a:p>
+                  </a:txBody>
+                  <a:tcPr marT="54864" marB="54864">
+                    <a:lnL w="6350" cap="flat" cmpd="sng" algn="ctr">
+                      <a:solidFill>
+                        <a:srgbClr val="CBD5E1"/>
+                      </a:solidFill>
+                      <a:prstDash val="solid"/>
+                      <a:round/>
+                      <a:headEnd type="none" w="med" len="med"/>
+                      <a:tailEnd type="none" w="med" len="med"/>
+                    </a:lnL>
+                    <a:lnR w="6350" cap="flat" cmpd="sng" algn="ctr">
+                      <a:solidFill>
+                        <a:srgbClr val="CBD5E1"/>
+                      </a:solidFill>
+                      <a:prstDash val="solid"/>
+                      <a:round/>
+                      <a:headEnd type="none" w="med" len="med"/>
+                      <a:tailEnd type="none" w="med" len="med"/>
+                    </a:lnR>
+                    <a:lnT w="6350" cap="flat" cmpd="sng" algn="ctr">
+                      <a:solidFill>
+                        <a:srgbClr val="CBD5E1"/>
+                      </a:solidFill>
+                      <a:prstDash val="solid"/>
+                      <a:round/>
+                      <a:headEnd type="none" w="med" len="med"/>
+                      <a:tailEnd type="none" w="med" len="med"/>
+                    </a:lnT>
+                    <a:lnB w="6350" cap="flat" cmpd="sng" algn="ctr">
+                      <a:solidFill>
+                        <a:srgbClr val="CBD5E1"/>
+                      </a:solidFill>
+                      <a:prstDash val="solid"/>
+                      <a:round/>
+                      <a:headEnd type="none" w="med" len="med"/>
+                      <a:tailEnd type="none" w="med" len="med"/>
+                    </a:lnB>
+                  </a:tcPr>
+                </a:tc>
+                <a:extLst>
+                  <a:ext uri="{0D108BD9-81ED-4DB2-BD59-A6C34878D82A}">
+                    <a16:rowId xmlns:a16="http://schemas.microsoft.com/office/drawing/2014/main" val="10001"/>
+                  </a:ext>
+                </a:extLst>
+              </a:tr>
+              <a:tr h="548640">
+                <a:tc>
+                  <a:txBody>
+                    <a:bodyPr/>
+                    <a:lstStyle/>
+                    <a:p>
+                      <a:pPr marL="0" indent="0">
+                        <a:buNone/>
+                      </a:pPr>
+                      <a:r>
+                        <a:rPr lang="en-US" sz="1000" b="1" dirty="0">
+                          <a:solidFill>
+                            <a:srgbClr val="1E293B"/>
+                          </a:solidFill>
+                        </a:rPr>
+                        <a:t>Functional</a:t>
+                      </a:r>
+                      <a:endParaRPr lang="en-US" sz="1000" dirty="0"/>
+                    </a:p>
+                    <a:p>
+                      <a:pPr marL="0" indent="0">
+                        <a:buNone/>
+                      </a:pPr>
+                      <a:r>
+                        <a:rPr lang="en-US" sz="1000" b="1" dirty="0">
+                          <a:solidFill>
+                            <a:srgbClr val="1E293B"/>
+                          </a:solidFill>
+                        </a:rPr>
+                        <a:t>Genomics — Reg.</a:t>
+                      </a:r>
+                      <a:endParaRPr lang="en-US" sz="1000" dirty="0"/>
+                    </a:p>
+                  </a:txBody>
+                  <a:tcPr marT="54864" marB="54864">
+                    <a:lnL w="6350" cap="flat" cmpd="sng" algn="ctr">
+                      <a:solidFill>
+                        <a:srgbClr val="CBD5E1"/>
+                      </a:solidFill>
+                      <a:prstDash val="solid"/>
+                      <a:round/>
+                      <a:headEnd type="none" w="med" len="med"/>
+                      <a:tailEnd type="none" w="med" len="med"/>
+                    </a:lnL>
+                    <a:lnR w="6350" cap="flat" cmpd="sng" algn="ctr">
+                      <a:solidFill>
+                        <a:srgbClr val="CBD5E1"/>
+                      </a:solidFill>
+                      <a:prstDash val="solid"/>
+                      <a:round/>
+                      <a:headEnd type="none" w="med" len="med"/>
+                      <a:tailEnd type="none" w="med" len="med"/>
+                    </a:lnR>
+                    <a:lnT w="6350" cap="flat" cmpd="sng" algn="ctr">
+                      <a:solidFill>
+                        <a:srgbClr val="CBD5E1"/>
+                      </a:solidFill>
+                      <a:prstDash val="solid"/>
+                      <a:round/>
+                      <a:headEnd type="none" w="med" len="med"/>
+                      <a:tailEnd type="none" w="med" len="med"/>
+                    </a:lnT>
+                    <a:lnB w="6350" cap="flat" cmpd="sng" algn="ctr">
+                      <a:solidFill>
+                        <a:srgbClr val="CBD5E1"/>
+                      </a:solidFill>
+                      <a:prstDash val="solid"/>
+                      <a:round/>
+                      <a:headEnd type="none" w="med" len="med"/>
+                      <a:tailEnd type="none" w="med" len="med"/>
+                    </a:lnB>
+                  </a:tcPr>
+                </a:tc>
+                <a:tc>
+                  <a:txBody>
+                    <a:bodyPr/>
+                    <a:lstStyle/>
+                    <a:p>
+                      <a:pPr marL="0" indent="0">
+                        <a:buNone/>
+                      </a:pPr>
+                      <a:r>
+                        <a:rPr lang="en-US" sz="1000" dirty="0">
+                          <a:solidFill>
+                            <a:srgbClr val="475569"/>
+                          </a:solidFill>
+                        </a:rPr>
+                        <a:t>E2G mean (+ neighbourhood)</a:t>
+                      </a:r>
+                      <a:endParaRPr lang="en-US" sz="1000" dirty="0"/>
+                    </a:p>
+                  </a:txBody>
+                  <a:tcPr marT="54864" marB="54864">
+                    <a:lnL w="6350" cap="flat" cmpd="sng" algn="ctr">
+                      <a:solidFill>
+                        <a:srgbClr val="CBD5E1"/>
+                      </a:solidFill>
+                      <a:prstDash val="solid"/>
+                      <a:round/>
+                      <a:headEnd type="none" w="med" len="med"/>
+                      <a:tailEnd type="none" w="med" len="med"/>
+                    </a:lnL>
+                    <a:lnR w="6350" cap="flat" cmpd="sng" algn="ctr">
+                      <a:solidFill>
+                        <a:srgbClr val="CBD5E1"/>
+                      </a:solidFill>
+                      <a:prstDash val="solid"/>
+                      <a:round/>
+                      <a:headEnd type="none" w="med" len="med"/>
+                      <a:tailEnd type="none" w="med" len="med"/>
+                    </a:lnR>
+                    <a:lnT w="6350" cap="flat" cmpd="sng" algn="ctr">
+                      <a:solidFill>
+                        <a:srgbClr val="CBD5E1"/>
+                      </a:solidFill>
+                      <a:prstDash val="solid"/>
+                      <a:round/>
+                      <a:headEnd type="none" w="med" len="med"/>
+                      <a:tailEnd type="none" w="med" len="med"/>
+                    </a:lnT>
+                    <a:lnB w="6350" cap="flat" cmpd="sng" algn="ctr">
+                      <a:solidFill>
+                        <a:srgbClr val="CBD5E1"/>
+                      </a:solidFill>
+                      <a:prstDash val="solid"/>
+                      <a:round/>
+                      <a:headEnd type="none" w="med" len="med"/>
+                      <a:tailEnd type="none" w="med" len="med"/>
+                    </a:lnB>
+                  </a:tcPr>
+                </a:tc>
+                <a:extLst>
+                  <a:ext uri="{0D108BD9-81ED-4DB2-BD59-A6C34878D82A}">
+                    <a16:rowId xmlns:a16="http://schemas.microsoft.com/office/drawing/2014/main" val="10002"/>
+                  </a:ext>
+                </a:extLst>
+              </a:tr>
+              <a:tr h="548640">
+                <a:tc>
+                  <a:txBody>
+                    <a:bodyPr/>
+                    <a:lstStyle/>
+                    <a:p>
+                      <a:pPr marL="0" indent="0">
+                        <a:buNone/>
+                      </a:pPr>
+                      <a:r>
+                        <a:rPr lang="en-US" sz="1000" b="1" dirty="0">
+                          <a:solidFill>
+                            <a:srgbClr val="1E293B"/>
+                          </a:solidFill>
+                        </a:rPr>
+                        <a:t>Functional</a:t>
+                      </a:r>
+                      <a:endParaRPr lang="en-US" sz="1000" dirty="0"/>
+                    </a:p>
+                    <a:p>
+                      <a:pPr marL="0" indent="0">
+                        <a:buNone/>
+                      </a:pPr>
+                      <a:r>
+                        <a:rPr lang="en-US" sz="1000" b="1" dirty="0">
+                          <a:solidFill>
+                            <a:srgbClr val="1E293B"/>
+                          </a:solidFill>
+                        </a:rPr>
+                        <a:t>Genomics — VEP</a:t>
+                      </a:r>
+                      <a:endParaRPr lang="en-US" sz="1000" dirty="0"/>
+                    </a:p>
+                  </a:txBody>
+                  <a:tcPr marT="54864" marB="54864">
+                    <a:lnL w="6350" cap="flat" cmpd="sng" algn="ctr">
+                      <a:solidFill>
+                        <a:srgbClr val="CBD5E1"/>
+                      </a:solidFill>
+                      <a:prstDash val="solid"/>
+                      <a:round/>
+                      <a:headEnd type="none" w="med" len="med"/>
+                      <a:tailEnd type="none" w="med" len="med"/>
+                    </a:lnL>
+                    <a:lnR w="6350" cap="flat" cmpd="sng" algn="ctr">
+                      <a:solidFill>
+                        <a:srgbClr val="CBD5E1"/>
+                      </a:solidFill>
+                      <a:prstDash val="solid"/>
+                      <a:round/>
+                      <a:headEnd type="none" w="med" len="med"/>
+                      <a:tailEnd type="none" w="med" len="med"/>
+                    </a:lnR>
+                    <a:lnT w="6350" cap="flat" cmpd="sng" algn="ctr">
+                      <a:solidFill>
+                        <a:srgbClr val="CBD5E1"/>
+                      </a:solidFill>
+                      <a:prstDash val="solid"/>
+                      <a:round/>
+                      <a:headEnd type="none" w="med" len="med"/>
+                      <a:tailEnd type="none" w="med" len="med"/>
+                    </a:lnT>
+                    <a:lnB w="6350" cap="flat" cmpd="sng" algn="ctr">
+                      <a:solidFill>
+                        <a:srgbClr val="CBD5E1"/>
+                      </a:solidFill>
+                      <a:prstDash val="solid"/>
+                      <a:round/>
+                      <a:headEnd type="none" w="med" len="med"/>
+                      <a:tailEnd type="none" w="med" len="med"/>
+                    </a:lnB>
+                  </a:tcPr>
+                </a:tc>
+                <a:tc>
+                  <a:txBody>
+                    <a:bodyPr/>
+                    <a:lstStyle/>
+                    <a:p>
+                      <a:pPr marL="0" indent="0">
+                        <a:buNone/>
+                      </a:pPr>
+                      <a:r>
+                        <a:rPr lang="en-US" sz="1000" dirty="0">
+                          <a:solidFill>
+                            <a:srgbClr val="A93226"/>
+                          </a:solidFill>
+                        </a:rPr>
+                        <a:t>VEP max / mean (+ neighbourhood)</a:t>
+                      </a:r>
+                      <a:endParaRPr lang="en-US" sz="1000" dirty="0"/>
+                    </a:p>
+                    <a:p>
+                      <a:pPr marL="0" indent="0">
+                        <a:buNone/>
+                      </a:pPr>
+                      <a:r>
+                        <a:rPr lang="en-US" sz="1000" dirty="0">
+                          <a:solidFill>
+                            <a:srgbClr val="A93226"/>
+                          </a:solidFill>
+                        </a:rPr>
+                        <a:t>Background min = 0.2 for all positives</a:t>
+                      </a:r>
+                      <a:endParaRPr lang="en-US" sz="1000" dirty="0"/>
+                    </a:p>
+                  </a:txBody>
+                  <a:tcPr marT="54864" marB="54864">
+                    <a:lnL w="6350" cap="flat" cmpd="sng" algn="ctr">
+                      <a:solidFill>
+                        <a:srgbClr val="CBD5E1"/>
+                      </a:solidFill>
+                      <a:prstDash val="solid"/>
+                      <a:round/>
+                      <a:headEnd type="none" w="med" len="med"/>
+                      <a:tailEnd type="none" w="med" len="med"/>
+                    </a:lnL>
+                    <a:lnR w="6350" cap="flat" cmpd="sng" algn="ctr">
+                      <a:solidFill>
+                        <a:srgbClr val="CBD5E1"/>
+                      </a:solidFill>
+                      <a:prstDash val="solid"/>
+                      <a:round/>
+                      <a:headEnd type="none" w="med" len="med"/>
+                      <a:tailEnd type="none" w="med" len="med"/>
+                    </a:lnR>
+                    <a:lnT w="6350" cap="flat" cmpd="sng" algn="ctr">
+                      <a:solidFill>
+                        <a:srgbClr val="CBD5E1"/>
+                      </a:solidFill>
+                      <a:prstDash val="solid"/>
+                      <a:round/>
+                      <a:headEnd type="none" w="med" len="med"/>
+                      <a:tailEnd type="none" w="med" len="med"/>
+                    </a:lnT>
+                    <a:lnB w="6350" cap="flat" cmpd="sng" algn="ctr">
+                      <a:solidFill>
+                        <a:srgbClr val="CBD5E1"/>
+                      </a:solidFill>
+                      <a:prstDash val="solid"/>
+                      <a:round/>
+                      <a:headEnd type="none" w="med" len="med"/>
+                      <a:tailEnd type="none" w="med" len="med"/>
+                    </a:lnB>
+                  </a:tcPr>
+                </a:tc>
+                <a:extLst>
+                  <a:ext uri="{0D108BD9-81ED-4DB2-BD59-A6C34878D82A}">
+                    <a16:rowId xmlns:a16="http://schemas.microsoft.com/office/drawing/2014/main" val="10003"/>
+                  </a:ext>
+                </a:extLst>
+              </a:tr>
+              <a:tr h="548640">
+                <a:tc>
+                  <a:txBody>
+                    <a:bodyPr/>
+                    <a:lstStyle/>
+                    <a:p>
+                      <a:pPr marL="0" indent="0">
+                        <a:buNone/>
+                      </a:pPr>
+                      <a:r>
+                        <a:rPr lang="en-US" sz="1000" b="1" dirty="0">
+                          <a:solidFill>
+                            <a:srgbClr val="1E293B"/>
+                          </a:solidFill>
+                        </a:rPr>
+                        <a:t>Distance-based</a:t>
+                      </a:r>
+                      <a:endParaRPr lang="en-US" sz="1000" dirty="0"/>
+                    </a:p>
+                  </a:txBody>
+                  <a:tcPr marT="54864" marB="54864">
+                    <a:lnL w="6350" cap="flat" cmpd="sng" algn="ctr">
+                      <a:solidFill>
+                        <a:srgbClr val="CBD5E1"/>
+                      </a:solidFill>
+                      <a:prstDash val="solid"/>
+                      <a:round/>
+                      <a:headEnd type="none" w="med" len="med"/>
+                      <a:tailEnd type="none" w="med" len="med"/>
+                    </a:lnL>
+                    <a:lnR w="6350" cap="flat" cmpd="sng" algn="ctr">
+                      <a:solidFill>
+                        <a:srgbClr val="CBD5E1"/>
+                      </a:solidFill>
+                      <a:prstDash val="solid"/>
+                      <a:round/>
+                      <a:headEnd type="none" w="med" len="med"/>
+                      <a:tailEnd type="none" w="med" len="med"/>
+                    </a:lnR>
+                    <a:lnT w="6350" cap="flat" cmpd="sng" algn="ctr">
+                      <a:solidFill>
+                        <a:srgbClr val="CBD5E1"/>
+                      </a:solidFill>
+                      <a:prstDash val="solid"/>
+                      <a:round/>
+                      <a:headEnd type="none" w="med" len="med"/>
+                      <a:tailEnd type="none" w="med" len="med"/>
+                    </a:lnT>
+                    <a:lnB w="6350" cap="flat" cmpd="sng" algn="ctr">
+                      <a:solidFill>
+                        <a:srgbClr val="CBD5E1"/>
+                      </a:solidFill>
+                      <a:prstDash val="solid"/>
+                      <a:round/>
+                      <a:headEnd type="none" w="med" len="med"/>
+                      <a:tailEnd type="none" w="med" len="med"/>
+                    </a:lnB>
+                  </a:tcPr>
+                </a:tc>
+                <a:tc>
+                  <a:txBody>
+                    <a:bodyPr/>
+                    <a:lstStyle/>
+                    <a:p>
+                      <a:pPr marL="0" indent="0">
+                        <a:buNone/>
+                      </a:pPr>
+                      <a:r>
+                        <a:rPr lang="en-US" sz="1000" dirty="0">
+                          <a:solidFill>
+                            <a:srgbClr val="475569"/>
+                          </a:solidFill>
+                        </a:rPr>
+                        <a:t>distanceSentinelTss/Footprint + Mean</a:t>
+                      </a:r>
+                      <a:endParaRPr lang="en-US" sz="1000" dirty="0"/>
+                    </a:p>
+                    <a:p>
+                      <a:pPr marL="0" indent="0">
+                        <a:buNone/>
+                      </a:pPr>
+                      <a:r>
+                        <a:rPr lang="en-US" sz="1000" dirty="0">
+                          <a:solidFill>
+                            <a:srgbClr val="475569"/>
+                          </a:solidFill>
+                        </a:rPr>
+                        <a:t>variants + Neighbourhood scores (×8)</a:t>
+                      </a:r>
+                      <a:endParaRPr lang="en-US" sz="1000" dirty="0"/>
+                    </a:p>
+                  </a:txBody>
+                  <a:tcPr marT="54864" marB="54864">
+                    <a:lnL w="6350" cap="flat" cmpd="sng" algn="ctr">
+                      <a:solidFill>
+                        <a:srgbClr val="CBD5E1"/>
+                      </a:solidFill>
+                      <a:prstDash val="solid"/>
+                      <a:round/>
+                      <a:headEnd type="none" w="med" len="med"/>
+                      <a:tailEnd type="none" w="med" len="med"/>
+                    </a:lnL>
+                    <a:lnR w="6350" cap="flat" cmpd="sng" algn="ctr">
+                      <a:solidFill>
+                        <a:srgbClr val="CBD5E1"/>
+                      </a:solidFill>
+                      <a:prstDash val="solid"/>
+                      <a:round/>
+                      <a:headEnd type="none" w="med" len="med"/>
+                      <a:tailEnd type="none" w="med" len="med"/>
+                    </a:lnR>
+                    <a:lnT w="6350" cap="flat" cmpd="sng" algn="ctr">
+                      <a:solidFill>
+                        <a:srgbClr val="CBD5E1"/>
+                      </a:solidFill>
+                      <a:prstDash val="solid"/>
+                      <a:round/>
+                      <a:headEnd type="none" w="med" len="med"/>
+                      <a:tailEnd type="none" w="med" len="med"/>
+                    </a:lnT>
+                    <a:lnB w="6350" cap="flat" cmpd="sng" algn="ctr">
+                      <a:solidFill>
+                        <a:srgbClr val="CBD5E1"/>
+                      </a:solidFill>
+                      <a:prstDash val="solid"/>
+                      <a:round/>
+                      <a:headEnd type="none" w="med" len="med"/>
+                      <a:tailEnd type="none" w="med" len="med"/>
+                    </a:lnB>
+                  </a:tcPr>
+                </a:tc>
+                <a:extLst>
+                  <a:ext uri="{0D108BD9-81ED-4DB2-BD59-A6C34878D82A}">
+                    <a16:rowId xmlns:a16="http://schemas.microsoft.com/office/drawing/2014/main" val="10004"/>
+                  </a:ext>
+                </a:extLst>
+              </a:tr>
+              <a:tr h="548640">
+                <a:tc>
+                  <a:txBody>
+                    <a:bodyPr/>
+                    <a:lstStyle/>
+                    <a:p>
+                      <a:pPr marL="0" indent="0">
+                        <a:buNone/>
+                      </a:pPr>
+                      <a:r>
+                        <a:rPr lang="en-US" sz="1000" b="1" dirty="0">
+                          <a:solidFill>
+                            <a:srgbClr val="1E293B"/>
+                          </a:solidFill>
+                        </a:rPr>
+                        <a:t>Meta / other</a:t>
+                      </a:r>
+                      <a:endParaRPr lang="en-US" sz="1000" dirty="0"/>
+                    </a:p>
+                  </a:txBody>
+                  <a:tcPr marT="54864" marB="54864">
+                    <a:lnL w="6350" cap="flat" cmpd="sng" algn="ctr">
+                      <a:solidFill>
+                        <a:srgbClr val="CBD5E1"/>
+                      </a:solidFill>
+                      <a:prstDash val="solid"/>
+                      <a:round/>
+                      <a:headEnd type="none" w="med" len="med"/>
+                      <a:tailEnd type="none" w="med" len="med"/>
+                    </a:lnL>
+                    <a:lnR w="6350" cap="flat" cmpd="sng" algn="ctr">
+                      <a:solidFill>
+                        <a:srgbClr val="CBD5E1"/>
+                      </a:solidFill>
+                      <a:prstDash val="solid"/>
+                      <a:round/>
+                      <a:headEnd type="none" w="med" len="med"/>
+                      <a:tailEnd type="none" w="med" len="med"/>
+                    </a:lnR>
+                    <a:lnT w="6350" cap="flat" cmpd="sng" algn="ctr">
+                      <a:solidFill>
+                        <a:srgbClr val="CBD5E1"/>
+                      </a:solidFill>
+                      <a:prstDash val="solid"/>
+                      <a:round/>
+                      <a:headEnd type="none" w="med" len="med"/>
+                      <a:tailEnd type="none" w="med" len="med"/>
+                    </a:lnT>
+                    <a:lnB w="6350" cap="flat" cmpd="sng" algn="ctr">
+                      <a:solidFill>
+                        <a:srgbClr val="CBD5E1"/>
+                      </a:solidFill>
+                      <a:prstDash val="solid"/>
+                      <a:round/>
+                      <a:headEnd type="none" w="med" len="med"/>
+                      <a:tailEnd type="none" w="med" len="med"/>
+                    </a:lnB>
+                  </a:tcPr>
+                </a:tc>
+                <a:tc>
+                  <a:txBody>
+                    <a:bodyPr/>
+                    <a:lstStyle/>
+                    <a:p>
+                      <a:pPr marL="0" indent="0">
+                        <a:buNone/>
+                      </a:pPr>
+                      <a:r>
+                        <a:rPr lang="en-US" sz="1000" dirty="0">
+                          <a:solidFill>
+                            <a:srgbClr val="475569"/>
+                          </a:solidFill>
+                        </a:rPr>
+                        <a:t>credibleSetConfidence, geneCount500kb,</a:t>
+                      </a:r>
+                      <a:endParaRPr lang="en-US" sz="1000" dirty="0"/>
+                    </a:p>
+                    <a:p>
+                      <a:pPr marL="0" indent="0">
+                        <a:buNone/>
+                      </a:pPr>
+                      <a:r>
+                        <a:rPr lang="en-US" sz="1000" dirty="0">
+                          <a:solidFill>
+                            <a:srgbClr val="475569"/>
+                          </a:solidFill>
+                        </a:rPr>
+                        <a:t>proteinGeneCount500kb, isProteinCoding</a:t>
+                      </a:r>
+                      <a:endParaRPr lang="en-US" sz="1000" dirty="0"/>
+                    </a:p>
+                  </a:txBody>
+                  <a:tcPr marT="54864" marB="54864">
+                    <a:lnL w="6350" cap="flat" cmpd="sng" algn="ctr">
+                      <a:solidFill>
+                        <a:srgbClr val="CBD5E1"/>
+                      </a:solidFill>
+                      <a:prstDash val="solid"/>
+                      <a:round/>
+                      <a:headEnd type="none" w="med" len="med"/>
+                      <a:tailEnd type="none" w="med" len="med"/>
+                    </a:lnL>
+                    <a:lnR w="6350" cap="flat" cmpd="sng" algn="ctr">
+                      <a:solidFill>
+                        <a:srgbClr val="CBD5E1"/>
+                      </a:solidFill>
+                      <a:prstDash val="solid"/>
+                      <a:round/>
+                      <a:headEnd type="none" w="med" len="med"/>
+                      <a:tailEnd type="none" w="med" len="med"/>
+                    </a:lnR>
+                    <a:lnT w="6350" cap="flat" cmpd="sng" algn="ctr">
+                      <a:solidFill>
+                        <a:srgbClr val="CBD5E1"/>
+                      </a:solidFill>
+                      <a:prstDash val="solid"/>
+                      <a:round/>
+                      <a:headEnd type="none" w="med" len="med"/>
+                      <a:tailEnd type="none" w="med" len="med"/>
+                    </a:lnT>
+                    <a:lnB w="6350" cap="flat" cmpd="sng" algn="ctr">
+                      <a:solidFill>
+                        <a:srgbClr val="CBD5E1"/>
+                      </a:solidFill>
+                      <a:prstDash val="solid"/>
+                      <a:round/>
+                      <a:headEnd type="none" w="med" len="med"/>
+                      <a:tailEnd type="none" w="med" len="med"/>
+                    </a:lnB>
+                  </a:tcPr>
+                </a:tc>
+                <a:extLst>
+                  <a:ext uri="{0D108BD9-81ED-4DB2-BD59-A6C34878D82A}">
+                    <a16:rowId xmlns:a16="http://schemas.microsoft.com/office/drawing/2014/main" val="10005"/>
+                  </a:ext>
+                </a:extLst>
+              </a:tr>
+            </a:tbl>
+          </a:graphicData>
+        </a:graphic>
+      </p:graphicFrame>
+    </p:spTree>
+  </p:cSld>
+  <p:clrMapOvr>
+    <a:masterClrMapping/>
+  </p:clrMapOvr>
+</p:sld>
+</file>
+
+<file path=ppt/slides/slide8.xml><?xml version="1.0" encoding="utf-8"?>
+<p:sld xmlns:a="http://schemas.openxmlformats.org/drawingml/2006/main" xmlns:r="http://schemas.openxmlformats.org/officeDocument/2006/relationships" xmlns:p="http://schemas.openxmlformats.org/presentationml/2006/main">
+  <p:cSld>
+    <p:bg>
+      <p:bgPr>
+        <a:solidFill>
+          <a:srgbClr val="0D2B45"/>
+        </a:solidFill>
+        <a:effectLst/>
+      </p:bgPr>
+    </p:bg>
+    <p:spTree>
+      <p:nvGrpSpPr>
+        <p:cNvPr id="1" name=""/>
+        <p:cNvGrpSpPr/>
+        <p:nvPr/>
+      </p:nvGrpSpPr>
+      <p:grpSpPr>
+        <a:xfrm>
+          <a:off x="0" y="0"/>
+          <a:ext cx="0" cy="0"/>
+          <a:chOff x="0" y="0"/>
+          <a:chExt cx="0" cy="0"/>
+        </a:xfrm>
+      </p:grpSpPr>
+      <p:sp>
+        <p:nvSpPr>
+          <p:cNvPr id="2" name="Shape 0"/>
+          <p:cNvSpPr/>
+          <p:nvPr/>
+        </p:nvSpPr>
+        <p:spPr>
+          <a:xfrm>
+            <a:off x="0" y="0"/>
+            <a:ext cx="9144000" cy="73152"/>
+          </a:xfrm>
+          <a:prstGeom prst="rect">
+            <a:avLst/>
+          </a:prstGeom>
+          <a:solidFill>
+            <a:srgbClr val="06B6D4"/>
+          </a:solidFill>
+          <a:ln w="12700">
+            <a:solidFill>
+              <a:srgbClr val="06B6D4"/>
+            </a:solidFill>
+            <a:prstDash val="solid"/>
+          </a:ln>
+        </p:spPr>
+        <p:txBody>
+          <a:bodyPr/>
+          <a:lstStyle/>
+          <a:p>
+            <a:endParaRPr lang="en-US"/>
+          </a:p>
+        </p:txBody>
+      </p:sp>
+      <p:sp>
+        <p:nvSpPr>
+          <p:cNvPr id="3" name="Shape 1"/>
+          <p:cNvSpPr/>
+          <p:nvPr/>
+        </p:nvSpPr>
+        <p:spPr>
+          <a:xfrm>
+            <a:off x="0" y="5070348"/>
+            <a:ext cx="9144000" cy="73152"/>
+          </a:xfrm>
+          <a:prstGeom prst="rect">
+            <a:avLst/>
+          </a:prstGeom>
+          <a:solidFill>
+            <a:srgbClr val="06B6D4"/>
+          </a:solidFill>
+          <a:ln w="12700">
+            <a:solidFill>
+              <a:srgbClr val="06B6D4"/>
+            </a:solidFill>
+            <a:prstDash val="solid"/>
+          </a:ln>
+        </p:spPr>
+        <p:txBody>
+          <a:bodyPr/>
+          <a:lstStyle/>
+          <a:p>
+            <a:endParaRPr lang="en-US"/>
+          </a:p>
+        </p:txBody>
+      </p:sp>
+      <p:sp>
+        <p:nvSpPr>
+          <p:cNvPr id="4" name="Text 2"/>
+          <p:cNvSpPr/>
+          <p:nvPr/>
+        </p:nvSpPr>
+        <p:spPr>
+          <a:xfrm>
+            <a:off x="457200" y="91440"/>
+            <a:ext cx="8229600" cy="566928"/>
+          </a:xfrm>
+          <a:prstGeom prst="rect">
+            <a:avLst/>
+          </a:prstGeom>
+          <a:noFill/>
+          <a:ln/>
+        </p:spPr>
+        <p:txBody>
+          <a:bodyPr wrap="square" lIns="0" tIns="0" rIns="0" bIns="0" rtlCol="0" anchor="ctr"/>
+          <a:lstStyle/>
+          <a:p>
+            <a:pPr marL="0" indent="0">
+              <a:buNone/>
+            </a:pPr>
+            <a:r>
+              <a:rPr lang="en-US" sz="2600" b="1" dirty="0">
+                <a:solidFill>
+                  <a:srgbClr val="FFFFFF"/>
+                </a:solidFill>
+              </a:rPr>
+              <a:t>Dark Matter in the Training Set</a:t>
+            </a:r>
+            <a:endParaRPr lang="en-US" sz="2600" dirty="0"/>
+          </a:p>
+        </p:txBody>
+      </p:sp>
+      <p:sp>
+        <p:nvSpPr>
+          <p:cNvPr id="5" name="Shape 3"/>
+          <p:cNvSpPr/>
+          <p:nvPr/>
+        </p:nvSpPr>
+        <p:spPr>
+          <a:xfrm>
+            <a:off x="274320" y="758952"/>
+            <a:ext cx="8595360" cy="713232"/>
+          </a:xfrm>
+          <a:prstGeom prst="rect">
+            <a:avLst/>
+          </a:prstGeom>
+          <a:solidFill>
+            <a:srgbClr val="0A1E30"/>
+          </a:solidFill>
+          <a:ln w="12700">
+            <a:solidFill>
+              <a:srgbClr val="06B6D4"/>
+            </a:solidFill>
+            <a:prstDash val="solid"/>
+          </a:ln>
+        </p:spPr>
+        <p:txBody>
+          <a:bodyPr/>
+          <a:lstStyle/>
+          <a:p>
+            <a:endParaRPr lang="en-US"/>
+          </a:p>
+        </p:txBody>
+      </p:sp>
+      <p:sp>
+        <p:nvSpPr>
+          <p:cNvPr id="6" name="Text 4"/>
+          <p:cNvSpPr/>
+          <p:nvPr/>
+        </p:nvSpPr>
+        <p:spPr>
+          <a:xfrm>
+            <a:off x="411480" y="795528"/>
+            <a:ext cx="8321040" cy="640080"/>
+          </a:xfrm>
+          <a:prstGeom prst="rect">
+            <a:avLst/>
+          </a:prstGeom>
+          <a:noFill/>
+          <a:ln/>
+        </p:spPr>
+        <p:txBody>
+          <a:bodyPr wrap="square" lIns="0" tIns="0" rIns="0" bIns="0" rtlCol="0" anchor="ctr"/>
+          <a:lstStyle/>
+          <a:p>
+            <a:pPr marL="0" indent="0">
+              <a:buNone/>
+            </a:pPr>
+            <a:r>
+              <a:rPr lang="en-US" sz="1150" b="1" dirty="0">
+                <a:solidFill>
+                  <a:srgbClr val="06B6D4"/>
+                </a:solidFill>
+              </a:rPr>
+              <a:t>Definition: </a:t>
+            </a:r>
+            <a:r>
+              <a:rPr lang="en-US" sz="1150" dirty="0">
+                <a:solidFill>
+                  <a:srgbClr val="CBD5E1"/>
+                </a:solidFill>
+              </a:rPr>
+              <a:t>GSP=1 rows that are (1) not nearest by TSS, (2) not nearest by footprint, AND (3) have zero value across all QTL colocalisation and E2G features. The only remaining signal is distance rank and background VEP (min 0.2 for all positives — not gene-specific).</a:t>
+            </a:r>
+            <a:endParaRPr lang="en-US" sz="1150" dirty="0"/>
+          </a:p>
+        </p:txBody>
+      </p:sp>
+      <p:sp>
+        <p:nvSpPr>
+          <p:cNvPr id="7" name="Shape 5"/>
+          <p:cNvSpPr/>
+          <p:nvPr/>
+        </p:nvSpPr>
+        <p:spPr>
+          <a:xfrm>
+            <a:off x="274320" y="1581912"/>
+            <a:ext cx="2697480" cy="1920240"/>
+          </a:xfrm>
+          <a:prstGeom prst="rect">
+            <a:avLst/>
+          </a:prstGeom>
+          <a:solidFill>
+            <a:srgbClr val="0A1E30"/>
+          </a:solidFill>
+          <a:ln w="12700">
+            <a:solidFill>
+              <a:srgbClr val="C0392B"/>
+            </a:solidFill>
+            <a:prstDash val="solid"/>
+          </a:ln>
+        </p:spPr>
+        <p:txBody>
+          <a:bodyPr/>
+          <a:lstStyle/>
+          <a:p>
+            <a:endParaRPr lang="en-US"/>
+          </a:p>
+        </p:txBody>
+      </p:sp>
+      <p:sp>
+        <p:nvSpPr>
+          <p:cNvPr id="8" name="Text 6"/>
+          <p:cNvSpPr/>
+          <p:nvPr/>
+        </p:nvSpPr>
+        <p:spPr>
+          <a:xfrm>
+            <a:off x="274320" y="1645920"/>
+            <a:ext cx="2697480" cy="658368"/>
+          </a:xfrm>
+          <a:prstGeom prst="rect">
+            <a:avLst/>
+          </a:prstGeom>
+          <a:noFill/>
+          <a:ln/>
+        </p:spPr>
+        <p:txBody>
+          <a:bodyPr wrap="square" lIns="0" tIns="0" rIns="0" bIns="0" rtlCol="0" anchor="ctr"/>
+          <a:lstStyle/>
+          <a:p>
+            <a:pPr marL="0" indent="0" algn="ctr">
+              <a:buNone/>
+            </a:pPr>
+            <a:r>
+              <a:rPr lang="en-US" sz="3400" b="1" dirty="0">
+                <a:solidFill>
+                  <a:srgbClr val="E74C3C"/>
+                </a:solidFill>
+              </a:rPr>
+              <a:t>22.8%</a:t>
+            </a:r>
+            <a:endParaRPr lang="en-US" sz="3400" dirty="0"/>
+          </a:p>
+        </p:txBody>
+      </p:sp>
+      <p:sp>
+        <p:nvSpPr>
+          <p:cNvPr id="9" name="Text 7"/>
+          <p:cNvSpPr/>
+          <p:nvPr/>
+        </p:nvSpPr>
+        <p:spPr>
+          <a:xfrm>
+            <a:off x="274320" y="2304288"/>
+            <a:ext cx="2697480" cy="365760"/>
+          </a:xfrm>
+          <a:prstGeom prst="rect">
+            <a:avLst/>
+          </a:prstGeom>
+          <a:noFill/>
+          <a:ln/>
+        </p:spPr>
+        <p:txBody>
+          <a:bodyPr wrap="square" lIns="0" tIns="0" rIns="0" bIns="0" rtlCol="0" anchor="ctr"/>
+          <a:lstStyle/>
+          <a:p>
+            <a:pPr marL="0" indent="0" algn="ctr">
+              <a:buNone/>
+            </a:pPr>
+            <a:r>
+              <a:rPr lang="en-US" sz="1600" b="1" dirty="0">
+                <a:solidFill>
+                  <a:srgbClr val="FFFFFF"/>
+                </a:solidFill>
+              </a:rPr>
+              <a:t>2,977</a:t>
+            </a:r>
+            <a:endParaRPr lang="en-US" sz="1600" dirty="0"/>
+          </a:p>
+        </p:txBody>
+      </p:sp>
+      <p:sp>
+        <p:nvSpPr>
+          <p:cNvPr id="10" name="Text 8"/>
+          <p:cNvSpPr/>
+          <p:nvPr/>
+        </p:nvSpPr>
+        <p:spPr>
+          <a:xfrm>
+            <a:off x="274320" y="2679192"/>
+            <a:ext cx="2697480" cy="256032"/>
+          </a:xfrm>
+          <a:prstGeom prst="rect">
+            <a:avLst/>
+          </a:prstGeom>
+          <a:noFill/>
+          <a:ln/>
+        </p:spPr>
+        <p:txBody>
+          <a:bodyPr wrap="square" lIns="0" tIns="0" rIns="0" bIns="0" rtlCol="0" anchor="ctr"/>
+          <a:lstStyle/>
+          <a:p>
+            <a:pPr marL="0" indent="0" algn="ctr">
+              <a:buNone/>
+            </a:pPr>
+            <a:r>
+              <a:rPr lang="en-US" sz="1100" dirty="0">
+                <a:solidFill>
+                  <a:srgbClr val="94A3B8"/>
+                </a:solidFill>
+              </a:rPr>
+              <a:t>of 13,060 positives</a:t>
+            </a:r>
+            <a:endParaRPr lang="en-US" sz="1100" dirty="0"/>
+          </a:p>
+        </p:txBody>
+      </p:sp>
+      <p:sp>
+        <p:nvSpPr>
+          <p:cNvPr id="11" name="Text 9"/>
+          <p:cNvSpPr/>
+          <p:nvPr/>
+        </p:nvSpPr>
+        <p:spPr>
+          <a:xfrm>
+            <a:off x="274320" y="2971800"/>
+            <a:ext cx="2697480" cy="256032"/>
+          </a:xfrm>
+          <a:prstGeom prst="rect">
+            <a:avLst/>
+          </a:prstGeom>
+          <a:noFill/>
+          <a:ln/>
+        </p:spPr>
+        <p:txBody>
+          <a:bodyPr wrap="square" lIns="0" tIns="0" rIns="0" bIns="0" rtlCol="0" anchor="ctr"/>
+          <a:lstStyle/>
+          <a:p>
+            <a:pPr marL="0" indent="0" algn="ctr">
+              <a:buNone/>
+            </a:pPr>
+            <a:r>
+              <a:rPr lang="en-US" sz="1100" b="1" dirty="0">
+                <a:solidFill>
+                  <a:srgbClr val="E74C3C"/>
+                </a:solidFill>
+              </a:rPr>
+              <a:t>All dark matter</a:t>
+            </a:r>
+            <a:endParaRPr lang="en-US" sz="1100" dirty="0"/>
+          </a:p>
+        </p:txBody>
+      </p:sp>
+      <p:sp>
+        <p:nvSpPr>
+          <p:cNvPr id="12" name="Shape 10"/>
+          <p:cNvSpPr/>
+          <p:nvPr/>
+        </p:nvSpPr>
+        <p:spPr>
+          <a:xfrm>
+            <a:off x="3154680" y="1581912"/>
+            <a:ext cx="2697480" cy="1920240"/>
+          </a:xfrm>
+          <a:prstGeom prst="rect">
+            <a:avLst/>
+          </a:prstGeom>
+          <a:solidFill>
+            <a:srgbClr val="0A1E30"/>
+          </a:solidFill>
+          <a:ln w="12700">
+            <a:solidFill>
+              <a:srgbClr val="C0392B"/>
+            </a:solidFill>
+            <a:prstDash val="solid"/>
+          </a:ln>
+        </p:spPr>
+        <p:txBody>
+          <a:bodyPr/>
+          <a:lstStyle/>
+          <a:p>
+            <a:endParaRPr lang="en-US"/>
+          </a:p>
+        </p:txBody>
+      </p:sp>
+      <p:sp>
+        <p:nvSpPr>
+          <p:cNvPr id="13" name="Text 11"/>
+          <p:cNvSpPr/>
+          <p:nvPr/>
+        </p:nvSpPr>
+        <p:spPr>
+          <a:xfrm>
+            <a:off x="3154680" y="1645920"/>
+            <a:ext cx="2697480" cy="658368"/>
+          </a:xfrm>
+          <a:prstGeom prst="rect">
+            <a:avLst/>
+          </a:prstGeom>
+          <a:noFill/>
+          <a:ln/>
+        </p:spPr>
+        <p:txBody>
+          <a:bodyPr wrap="square" lIns="0" tIns="0" rIns="0" bIns="0" rtlCol="0" anchor="ctr"/>
+          <a:lstStyle/>
+          <a:p>
+            <a:pPr marL="0" indent="0" algn="ctr">
+              <a:buNone/>
+            </a:pPr>
+            <a:r>
+              <a:rPr lang="en-US" sz="3400" b="1" dirty="0">
+                <a:solidFill>
+                  <a:srgbClr val="E74C3C"/>
+                </a:solidFill>
+              </a:rPr>
+              <a:t>22.5%</a:t>
+            </a:r>
+            <a:endParaRPr lang="en-US" sz="3400" dirty="0"/>
+          </a:p>
+        </p:txBody>
+      </p:sp>
+      <p:sp>
+        <p:nvSpPr>
+          <p:cNvPr id="14" name="Text 12"/>
+          <p:cNvSpPr/>
+          <p:nvPr/>
+        </p:nvSpPr>
+        <p:spPr>
+          <a:xfrm>
+            <a:off x="3154680" y="2304288"/>
+            <a:ext cx="2697480" cy="365760"/>
+          </a:xfrm>
+          <a:prstGeom prst="rect">
+            <a:avLst/>
+          </a:prstGeom>
+          <a:noFill/>
+          <a:ln/>
+        </p:spPr>
+        <p:txBody>
+          <a:bodyPr wrap="square" lIns="0" tIns="0" rIns="0" bIns="0" rtlCol="0" anchor="ctr"/>
+          <a:lstStyle/>
+          <a:p>
+            <a:pPr marL="0" indent="0" algn="ctr">
+              <a:buNone/>
+            </a:pPr>
+            <a:r>
+              <a:rPr lang="en-US" sz="1600" b="1" dirty="0">
+                <a:solidFill>
+                  <a:srgbClr val="FFFFFF"/>
+                </a:solidFill>
+              </a:rPr>
+              <a:t>1,621</a:t>
+            </a:r>
+            <a:endParaRPr lang="en-US" sz="1600" dirty="0"/>
+          </a:p>
+        </p:txBody>
+      </p:sp>
+      <p:sp>
+        <p:nvSpPr>
+          <p:cNvPr id="15" name="Text 13"/>
+          <p:cNvSpPr/>
+          <p:nvPr/>
+        </p:nvSpPr>
+        <p:spPr>
+          <a:xfrm>
+            <a:off x="3154680" y="2679192"/>
+            <a:ext cx="2697480" cy="256032"/>
+          </a:xfrm>
+          <a:prstGeom prst="rect">
+            <a:avLst/>
+          </a:prstGeom>
+          <a:noFill/>
+          <a:ln/>
+        </p:spPr>
+        <p:txBody>
+          <a:bodyPr wrap="square" lIns="0" tIns="0" rIns="0" bIns="0" rtlCol="0" anchor="ctr"/>
+          <a:lstStyle/>
+          <a:p>
+            <a:pPr marL="0" indent="0" algn="ctr">
+              <a:buNone/>
+            </a:pPr>
+            <a:r>
+              <a:rPr lang="en-US" sz="1100" dirty="0">
+                <a:solidFill>
+                  <a:srgbClr val="94A3B8"/>
+                </a:solidFill>
+              </a:rPr>
+              <a:t>of 7,201 nearest</a:t>
+            </a:r>
+            <a:endParaRPr lang="en-US" sz="1100" dirty="0"/>
+          </a:p>
+        </p:txBody>
+      </p:sp>
+      <p:sp>
+        <p:nvSpPr>
+          <p:cNvPr id="16" name="Text 14"/>
+          <p:cNvSpPr/>
+          <p:nvPr/>
+        </p:nvSpPr>
+        <p:spPr>
+          <a:xfrm>
+            <a:off x="3154680" y="2971800"/>
+            <a:ext cx="2697480" cy="256032"/>
+          </a:xfrm>
+          <a:prstGeom prst="rect">
+            <a:avLst/>
+          </a:prstGeom>
+          <a:noFill/>
+          <a:ln/>
+        </p:spPr>
+        <p:txBody>
+          <a:bodyPr wrap="square" lIns="0" tIns="0" rIns="0" bIns="0" rtlCol="0" anchor="ctr"/>
+          <a:lstStyle/>
+          <a:p>
+            <a:pPr marL="0" indent="0" algn="ctr">
+              <a:buNone/>
+            </a:pPr>
+            <a:r>
+              <a:rPr lang="en-US" sz="1100" b="1" dirty="0">
+                <a:solidFill>
+                  <a:srgbClr val="E74C3C"/>
+                </a:solidFill>
+              </a:rPr>
+              <a:t>Nearest TSS only</a:t>
+            </a:r>
+            <a:endParaRPr lang="en-US" sz="1100" dirty="0"/>
+          </a:p>
+        </p:txBody>
+      </p:sp>
+      <p:sp>
+        <p:nvSpPr>
+          <p:cNvPr id="17" name="Shape 15"/>
+          <p:cNvSpPr/>
+          <p:nvPr/>
+        </p:nvSpPr>
+        <p:spPr>
+          <a:xfrm>
+            <a:off x="6035040" y="1581912"/>
+            <a:ext cx="2697480" cy="1920240"/>
+          </a:xfrm>
+          <a:prstGeom prst="rect">
+            <a:avLst/>
+          </a:prstGeom>
+          <a:solidFill>
+            <a:srgbClr val="0A1E30"/>
+          </a:solidFill>
+          <a:ln w="12700">
+            <a:solidFill>
+              <a:srgbClr val="C0392B"/>
+            </a:solidFill>
+            <a:prstDash val="solid"/>
+          </a:ln>
+        </p:spPr>
+        <p:txBody>
+          <a:bodyPr/>
+          <a:lstStyle/>
+          <a:p>
+            <a:endParaRPr lang="en-US"/>
+          </a:p>
+        </p:txBody>
+      </p:sp>
+      <p:sp>
+        <p:nvSpPr>
+          <p:cNvPr id="18" name="Text 16"/>
+          <p:cNvSpPr/>
+          <p:nvPr/>
+        </p:nvSpPr>
+        <p:spPr>
+          <a:xfrm>
+            <a:off x="6035040" y="1645920"/>
+            <a:ext cx="2697480" cy="658368"/>
+          </a:xfrm>
+          <a:prstGeom prst="rect">
+            <a:avLst/>
+          </a:prstGeom>
+          <a:noFill/>
+          <a:ln/>
+        </p:spPr>
+        <p:txBody>
+          <a:bodyPr wrap="square" lIns="0" tIns="0" rIns="0" bIns="0" rtlCol="0" anchor="ctr"/>
+          <a:lstStyle/>
+          <a:p>
+            <a:pPr marL="0" indent="0" algn="ctr">
+              <a:buNone/>
+            </a:pPr>
+            <a:r>
+              <a:rPr lang="en-US" sz="3400" b="1" dirty="0">
+                <a:solidFill>
+                  <a:srgbClr val="E74C3C"/>
+                </a:solidFill>
+              </a:rPr>
+              <a:t>56.8%</a:t>
+            </a:r>
+            <a:endParaRPr lang="en-US" sz="3400" dirty="0"/>
+          </a:p>
+        </p:txBody>
+      </p:sp>
+      <p:sp>
+        <p:nvSpPr>
+          <p:cNvPr id="19" name="Text 17"/>
+          <p:cNvSpPr/>
+          <p:nvPr/>
+        </p:nvSpPr>
+        <p:spPr>
+          <a:xfrm>
+            <a:off x="6035040" y="2304288"/>
+            <a:ext cx="2697480" cy="365760"/>
+          </a:xfrm>
+          <a:prstGeom prst="rect">
+            <a:avLst/>
+          </a:prstGeom>
+          <a:noFill/>
+          <a:ln/>
+        </p:spPr>
+        <p:txBody>
+          <a:bodyPr wrap="square" lIns="0" tIns="0" rIns="0" bIns="0" rtlCol="0" anchor="ctr"/>
+          <a:lstStyle/>
+          <a:p>
+            <a:pPr marL="0" indent="0" algn="ctr">
+              <a:buNone/>
+            </a:pPr>
+            <a:r>
+              <a:rPr lang="en-US" sz="1600" b="1" dirty="0">
+                <a:solidFill>
+                  <a:srgbClr val="FFFFFF"/>
+                </a:solidFill>
+              </a:rPr>
+              <a:t>3,325</a:t>
+            </a:r>
+            <a:endParaRPr lang="en-US" sz="1600" dirty="0"/>
+          </a:p>
+        </p:txBody>
+      </p:sp>
+      <p:sp>
+        <p:nvSpPr>
+          <p:cNvPr id="20" name="Text 18"/>
+          <p:cNvSpPr/>
+          <p:nvPr/>
+        </p:nvSpPr>
+        <p:spPr>
+          <a:xfrm>
+            <a:off x="6035040" y="2679192"/>
+            <a:ext cx="2697480" cy="256032"/>
+          </a:xfrm>
+          <a:prstGeom prst="rect">
+            <a:avLst/>
+          </a:prstGeom>
+          <a:noFill/>
+          <a:ln/>
+        </p:spPr>
+        <p:txBody>
+          <a:bodyPr wrap="square" lIns="0" tIns="0" rIns="0" bIns="0" rtlCol="0" anchor="ctr"/>
+          <a:lstStyle/>
+          <a:p>
+            <a:pPr marL="0" indent="0" algn="ctr">
+              <a:buNone/>
+            </a:pPr>
+            <a:r>
+              <a:rPr lang="en-US" sz="1100" dirty="0">
+                <a:solidFill>
+                  <a:srgbClr val="94A3B8"/>
+                </a:solidFill>
+              </a:rPr>
+              <a:t>of 5,859 non-nearest</a:t>
+            </a:r>
+            <a:endParaRPr lang="en-US" sz="1100" dirty="0"/>
+          </a:p>
+        </p:txBody>
+      </p:sp>
+      <p:sp>
+        <p:nvSpPr>
+          <p:cNvPr id="21" name="Text 19"/>
+          <p:cNvSpPr/>
+          <p:nvPr/>
+        </p:nvSpPr>
+        <p:spPr>
+          <a:xfrm>
+            <a:off x="6035040" y="2971800"/>
+            <a:ext cx="2697480" cy="256032"/>
+          </a:xfrm>
+          <a:prstGeom prst="rect">
+            <a:avLst/>
+          </a:prstGeom>
+          <a:noFill/>
+          <a:ln/>
+        </p:spPr>
+        <p:txBody>
+          <a:bodyPr wrap="square" lIns="0" tIns="0" rIns="0" bIns="0" rtlCol="0" anchor="ctr"/>
+          <a:lstStyle/>
+          <a:p>
+            <a:pPr marL="0" indent="0" algn="ctr">
+              <a:buNone/>
+            </a:pPr>
+            <a:r>
+              <a:rPr lang="en-US" sz="1100" b="1" dirty="0">
+                <a:solidFill>
+                  <a:srgbClr val="E74C3C"/>
+                </a:solidFill>
+              </a:rPr>
+              <a:t>Non-nearest only</a:t>
+            </a:r>
+            <a:endParaRPr lang="en-US" sz="1100" dirty="0"/>
+          </a:p>
+        </p:txBody>
+      </p:sp>
+      <p:sp>
+        <p:nvSpPr>
+          <p:cNvPr id="22" name="Shape 20"/>
+          <p:cNvSpPr/>
+          <p:nvPr/>
+        </p:nvSpPr>
+        <p:spPr>
+          <a:xfrm>
+            <a:off x="274320" y="3364992"/>
+            <a:ext cx="4114800" cy="1508760"/>
+          </a:xfrm>
+          <a:prstGeom prst="rect">
+            <a:avLst/>
+          </a:prstGeom>
+          <a:solidFill>
+            <a:srgbClr val="0A1E30"/>
+          </a:solidFill>
+          <a:ln w="12700">
+            <a:solidFill>
+              <a:srgbClr val="944747"/>
+            </a:solidFill>
+            <a:prstDash val="solid"/>
+          </a:ln>
+        </p:spPr>
+        <p:txBody>
+          <a:bodyPr/>
+          <a:lstStyle/>
+          <a:p>
+            <a:endParaRPr lang="en-US"/>
+          </a:p>
+        </p:txBody>
+      </p:sp>
+      <p:sp>
+        <p:nvSpPr>
+          <p:cNvPr id="23" name="Text 21"/>
+          <p:cNvSpPr/>
+          <p:nvPr/>
+        </p:nvSpPr>
+        <p:spPr>
+          <a:xfrm>
+            <a:off x="411480" y="3410712"/>
+            <a:ext cx="3840480" cy="292608"/>
+          </a:xfrm>
+          <a:prstGeom prst="rect">
+            <a:avLst/>
+          </a:prstGeom>
+          <a:noFill/>
+          <a:ln/>
+        </p:spPr>
+        <p:txBody>
+          <a:bodyPr wrap="square" lIns="0" tIns="0" rIns="0" bIns="0" rtlCol="0" anchor="ctr"/>
+          <a:lstStyle/>
+          <a:p>
+            <a:pPr marL="0" indent="0">
+              <a:buNone/>
+            </a:pPr>
+            <a:r>
+              <a:rPr lang="en-US" sz="1150" b="1" dirty="0">
+                <a:solidFill>
+                  <a:srgbClr val="E74C3C"/>
+                </a:solidFill>
+              </a:rPr>
+              <a:t>What the model does with dark matter</a:t>
+            </a:r>
+            <a:endParaRPr lang="en-US" sz="1150" dirty="0"/>
+          </a:p>
+        </p:txBody>
+      </p:sp>
+      <p:sp>
+        <p:nvSpPr>
+          <p:cNvPr id="24" name="Text 22"/>
+          <p:cNvSpPr/>
+          <p:nvPr/>
+        </p:nvSpPr>
+        <p:spPr>
+          <a:xfrm>
+            <a:off x="411480" y="3721608"/>
+            <a:ext cx="3840480" cy="1097280"/>
+          </a:xfrm>
+          <a:prstGeom prst="rect">
+            <a:avLst/>
+          </a:prstGeom>
+          <a:noFill/>
+          <a:ln/>
+        </p:spPr>
+        <p:txBody>
+          <a:bodyPr wrap="square" lIns="0" tIns="0" rIns="0" bIns="0" rtlCol="0" anchor="ctr"/>
+          <a:lstStyle/>
+          <a:p>
+            <a:pPr marL="0" indent="0">
+              <a:buNone/>
+            </a:pPr>
+            <a:r>
+              <a:rPr lang="en-US" sz="1050" dirty="0">
+                <a:solidFill>
+                  <a:srgbClr val="CBD5E1"/>
+                </a:solidFill>
+              </a:rPr>
+              <a:t>Dark matter positives have feature vectors identical to thousands of negatives (QTL=0, E2G=0, non-nearest). The model receives conflicting gradient signal — identical inputs labelled both 0 and 1 — degrading decision boundaries for the 77.2% of positives that are learnable.</a:t>
+            </a:r>
+            <a:endParaRPr lang="en-US" sz="1050" dirty="0"/>
+          </a:p>
+        </p:txBody>
+      </p:sp>
+      <p:sp>
+        <p:nvSpPr>
+          <p:cNvPr id="25" name="Shape 23"/>
+          <p:cNvSpPr/>
+          <p:nvPr/>
+        </p:nvSpPr>
+        <p:spPr>
+          <a:xfrm>
+            <a:off x="4754880" y="3364992"/>
+            <a:ext cx="4114800" cy="1508760"/>
+          </a:xfrm>
+          <a:prstGeom prst="rect">
+            <a:avLst/>
+          </a:prstGeom>
+          <a:solidFill>
+            <a:srgbClr val="0A1E30"/>
+          </a:solidFill>
+          <a:ln w="12700">
+            <a:solidFill>
+              <a:srgbClr val="0E7490"/>
+            </a:solidFill>
+            <a:prstDash val="solid"/>
+          </a:ln>
+        </p:spPr>
+        <p:txBody>
+          <a:bodyPr/>
+          <a:lstStyle/>
+          <a:p>
+            <a:endParaRPr lang="en-US"/>
+          </a:p>
+        </p:txBody>
+      </p:sp>
+      <p:sp>
+        <p:nvSpPr>
+          <p:cNvPr id="26" name="Text 24"/>
+          <p:cNvSpPr/>
+          <p:nvPr/>
+        </p:nvSpPr>
+        <p:spPr>
+          <a:xfrm>
+            <a:off x="4892040" y="3410712"/>
+            <a:ext cx="3840480" cy="292608"/>
+          </a:xfrm>
+          <a:prstGeom prst="rect">
+            <a:avLst/>
+          </a:prstGeom>
+          <a:noFill/>
+          <a:ln/>
+        </p:spPr>
+        <p:txBody>
+          <a:bodyPr wrap="square" lIns="0" tIns="0" rIns="0" bIns="0" rtlCol="0" anchor="ctr"/>
+          <a:lstStyle/>
+          <a:p>
+            <a:pPr marL="0" indent="0">
+              <a:buNone/>
+            </a:pPr>
+            <a:r>
+              <a:rPr lang="en-US" sz="1150" b="1" dirty="0">
+                <a:solidFill>
+                  <a:srgbClr val="06B6D4"/>
+                </a:solidFill>
+              </a:rPr>
+              <a:t>Recommendation</a:t>
+            </a:r>
+            <a:endParaRPr lang="en-US" sz="1150" dirty="0"/>
+          </a:p>
+        </p:txBody>
+      </p:sp>
+      <p:sp>
+        <p:nvSpPr>
+          <p:cNvPr id="27" name="Text 25"/>
+          <p:cNvSpPr/>
+          <p:nvPr/>
+        </p:nvSpPr>
+        <p:spPr>
+          <a:xfrm>
+            <a:off x="4892040" y="3721608"/>
+            <a:ext cx="3840480" cy="1097280"/>
+          </a:xfrm>
+          <a:prstGeom prst="rect">
+            <a:avLst/>
+          </a:prstGeom>
+          <a:noFill/>
+          <a:ln/>
+        </p:spPr>
+        <p:txBody>
+          <a:bodyPr wrap="square" lIns="0" tIns="0" rIns="0" bIns="0" rtlCol="0" anchor="ctr"/>
+          <a:lstStyle/>
+          <a:p>
+            <a:pPr marL="0" indent="0">
+              <a:buNone/>
+            </a:pPr>
+            <a:r>
+              <a:rPr lang="en-US" sz="1050" dirty="0">
+                <a:solidFill>
+                  <a:srgbClr val="CBD5E1"/>
+                </a:solidFill>
+              </a:rPr>
+              <a:t>Remove dark matter loci from training (all rows for those 2,933 studyLocusIds).
+</a:t>
+            </a:r>
+            <a:r>
+              <a:rPr lang="en-US" sz="1050" b="1" dirty="0">
+                <a:solidFill>
+                  <a:srgbClr val="06B6D4"/>
+                </a:solidFill>
+              </a:rPr>
+              <a:t>Effect: </a:t>
+            </a:r>
+            <a:r>
+              <a:rPr lang="en-US" sz="1050" dirty="0">
+                <a:solidFill>
+                  <a:srgbClr val="CBD5E1"/>
+                </a:solidFill>
+              </a:rPr>
+              <a:t>146,626 rows remain. Nearest-TSS proportion 55.1% → 71.7%. Non-nearest fold-change over negatives roughly doubles. At inference on full FM, dark-matter-type loci default to nearest-gene prediction — the only valid fallback when no functional evidence exists.</a:t>
+            </a:r>
+            <a:endParaRPr lang="en-US" sz="1050" dirty="0"/>
           </a:p>
         </p:txBody>
       </p:sp>

--- a/2606/training_set_report.pptx
+++ b/2606/training_set_report.pptx
@@ -11373,7 +11373,7 @@
                             <a:srgbClr val="A93226"/>
                           </a:solidFill>
                         </a:rPr>
-                        <a:t>Background min = 0.2 for all positives</a:t>
+                        <a:t>Protein-altering threshold = 0.6 (SO:0001818)</a:t>
                       </a:r>
                       <a:endParaRPr lang="en-US" sz="1000" dirty="0"/>
                     </a:p>
@@ -11896,7 +11896,7 @@
                   <a:srgbClr val="06B6D4"/>
                 </a:solidFill>
               </a:rPr>
-              <a:t>Definition: </a:t>
+              <a:t xml:space="preserve">Definition: </a:t>
             </a:r>
             <a:r>
               <a:rPr lang="en-US" sz="1150" dirty="0">
@@ -11904,7 +11904,7 @@
                   <a:srgbClr val="CBD5E1"/>
                 </a:solidFill>
               </a:rPr>
-              <a:t>GSP=1 rows that are (1) not nearest by TSS, (2) not nearest by footprint, AND (3) have zero value across all QTL colocalisation and E2G features. The only remaining signal is distance rank and background VEP (min 0.2 for all positives — not gene-specific).</a:t>
+              <a:t>GSP=1 rows where (1) all four neighbourhood distances &lt; 1.0 (not nearest by TSS, footprint, mean-TSS, or mean-footprint), AND (2) all QTL colocalisation and E2G features are zero, AND (3) vepMaximum &lt; 0.6 (below protein-altering variant threshold, SO:0001818). Nearest-gene positives (any neighbourhood = 1.0) are always kept.</a:t>
             </a:r>
             <a:endParaRPr lang="en-US" sz="1150" dirty="0"/>
           </a:p>
@@ -11972,7 +11972,7 @@
                   <a:srgbClr val="E74C3C"/>
                 </a:solidFill>
               </a:rPr>
-              <a:t>22.8%</a:t>
+              <a:t>22.4%</a:t>
             </a:r>
             <a:endParaRPr lang="en-US" sz="3400" dirty="0"/>
           </a:p>
@@ -12008,7 +12008,7 @@
                   <a:srgbClr val="FFFFFF"/>
                 </a:solidFill>
               </a:rPr>
-              <a:t>2,977</a:t>
+              <a:t>2,928</a:t>
             </a:r>
             <a:endParaRPr lang="en-US" sz="1600" dirty="0"/>
           </a:p>
@@ -12148,7 +12148,7 @@
                   <a:srgbClr val="E74C3C"/>
                 </a:solidFill>
               </a:rPr>
-              <a:t>22.5%</a:t>
+              <a:t>0.0%</a:t>
             </a:r>
             <a:endParaRPr lang="en-US" sz="3400" dirty="0"/>
           </a:p>
@@ -12184,7 +12184,7 @@
                   <a:srgbClr val="FFFFFF"/>
                 </a:solidFill>
               </a:rPr>
-              <a:t>1,621</a:t>
+              <a:t>0</a:t>
             </a:r>
             <a:endParaRPr lang="en-US" sz="1600" dirty="0"/>
           </a:p>
@@ -12324,7 +12324,7 @@
                   <a:srgbClr val="E74C3C"/>
                 </a:solidFill>
               </a:rPr>
-              <a:t>56.8%</a:t>
+              <a:t>50.0%</a:t>
             </a:r>
             <a:endParaRPr lang="en-US" sz="3400" dirty="0"/>
           </a:p>
@@ -12360,7 +12360,7 @@
                   <a:srgbClr val="FFFFFF"/>
                 </a:solidFill>
               </a:rPr>
-              <a:t>3,325</a:t>
+              <a:t>2,928</a:t>
             </a:r>
             <a:endParaRPr lang="en-US" sz="1600" dirty="0"/>
           </a:p>
@@ -12536,7 +12536,7 @@
                   <a:srgbClr val="CBD5E1"/>
                 </a:solidFill>
               </a:rPr>
-              <a:t>Dark matter positives have feature vectors identical to thousands of negatives (QTL=0, E2G=0, non-nearest). The model receives conflicting gradient signal — identical inputs labelled both 0 and 1 — degrading decision boundaries for the 77.2% of positives that are learnable.</a:t>
+              <a:t>Dark matter positives have feature vectors identical to thousands of negatives (QTL=0, E2G=0, VEP&lt;0.6, non-nearest). The model receives conflicting gradient signal — identical inputs labelled both 0 and 1 — degrading decision boundaries for the 77.6% of positives that are learnable.</a:t>
             </a:r>
             <a:endParaRPr lang="en-US" sz="1050" dirty="0"/>
           </a:p>
@@ -12640,7 +12640,7 @@
                   <a:srgbClr val="CBD5E1"/>
                 </a:solidFill>
               </a:rPr>
-              <a:t>Remove dark matter loci from training (all rows for those 2,933 studyLocusIds).
+              <a:t>Remove loci where ALL positives are dark matter (2,639 studyLocusIds). Loci with mixed signal are kept in full.
 </a:t>
             </a:r>
             <a:r>
@@ -12649,7 +12649,7 @@
                   <a:srgbClr val="06B6D4"/>
                 </a:solidFill>
               </a:rPr>
-              <a:t>Effect: </a:t>
+              <a:t xml:space="preserve">Effect: </a:t>
             </a:r>
             <a:r>
               <a:rPr lang="en-US" sz="1050" dirty="0">
@@ -12657,7 +12657,7 @@
                   <a:srgbClr val="CBD5E1"/>
                 </a:solidFill>
               </a:rPr>
-              <a:t>146,626 rows remain. Nearest-TSS proportion 55.1% → 71.7%. Non-nearest fold-change over negatives roughly doubles. At inference on full FM, dark-matter-type loci default to nearest-gene prediction — the only valid fallback when no functional evidence exists.</a:t>
+              <a:t>152,687 rows remain (−23.9%). Nearest-TSS proportion 55.1% → 69.4% (+14.3 pp). Non-nearest fold-change over negatives roughly doubles. 245 residual dark matter positives in mixed loci are retained by design.</a:t>
             </a:r>
             <a:endParaRPr lang="en-US" sz="1050" dirty="0"/>
           </a:p>
